--- a/media/module4/slides.pptx
+++ b/media/module4/slides.pptx
@@ -22,6 +22,20 @@
     <p:sldId id="270" r:id="rId22"/>
     <p:sldId id="271" r:id="rId23"/>
     <p:sldId id="272" r:id="rId24"/>
+    <p:sldId id="273" r:id="rId25"/>
+    <p:sldId id="274" r:id="rId26"/>
+    <p:sldId id="275" r:id="rId27"/>
+    <p:sldId id="276" r:id="rId28"/>
+    <p:sldId id="277" r:id="rId29"/>
+    <p:sldId id="278" r:id="rId30"/>
+    <p:sldId id="279" r:id="rId31"/>
+    <p:sldId id="280" r:id="rId32"/>
+    <p:sldId id="281" r:id="rId33"/>
+    <p:sldId id="282" r:id="rId34"/>
+    <p:sldId id="283" r:id="rId35"/>
+    <p:sldId id="284" r:id="rId36"/>
+    <p:sldId id="285" r:id="rId37"/>
+    <p:sldId id="286" r:id="rId38"/>
   </p:sldIdLst>
   <p:sldSz cx="12191695" cy="6858000" type="screen4x3"/>
   <p:notesSz cx="6858000" cy="9144000"/>
@@ -518,7 +532,287 @@
           <a:lstStyle/>
           <a:p>
             <a:r>
-              <a:t>From MODULE4 Topics Covered.</a:t>
+              <a:t>From docs/MODULE4.md — read guides before running demos.</a:t>
+            </a:r>
+          </a:p>
+        </p:txBody>
+      </p:sp>
+      <p:sp>
+        <p:nvSpPr>
+          <p:cNvPr id="4" name="Slide Number Placeholder 3"/>
+          <p:cNvSpPr>
+            <a:spLocks noGrp="1"/>
+          </p:cNvSpPr>
+          <p:nvPr>
+            <p:ph type="sldNum" idx="5" sz="quarter"/>
+          </p:nvPr>
+        </p:nvSpPr>
+        <p:spPr/>
+      </p:sp>
+    </p:spTree>
+  </p:cSld>
+  <p:clrMapOvr>
+    <a:masterClrMapping/>
+  </p:clrMapOvr>
+</p:notes>
+</file>
+
+<file path=ppt/notesSlides/notesSlide10.xml><?xml version="1.0" encoding="utf-8"?>
+<p:notes xmlns:a="http://schemas.openxmlformats.org/drawingml/2006/main" xmlns:p="http://schemas.openxmlformats.org/presentationml/2006/main" xmlns:r="http://schemas.openxmlformats.org/officeDocument/2006/relationships">
+  <p:cSld>
+    <p:spTree>
+      <p:nvGrpSpPr>
+        <p:cNvPr id="1" name=""/>
+        <p:cNvGrpSpPr/>
+        <p:nvPr/>
+      </p:nvGrpSpPr>
+      <p:grpSpPr>
+        <a:xfrm>
+          <a:off x="0" y="0"/>
+          <a:ext cx="0" cy="0"/>
+          <a:chOff x="0" y="0"/>
+          <a:chExt cx="0" cy="0"/>
+        </a:xfrm>
+      </p:grpSpPr>
+      <p:sp>
+        <p:nvSpPr>
+          <p:cNvPr id="2" name="Slide Image Placeholder 1"/>
+          <p:cNvSpPr>
+            <a:spLocks noGrp="1"/>
+          </p:cNvSpPr>
+          <p:nvPr>
+            <p:ph type="sldImg" idx="2"/>
+          </p:nvPr>
+        </p:nvSpPr>
+        <p:spPr/>
+      </p:sp>
+      <p:sp>
+        <p:nvSpPr>
+          <p:cNvPr id="3" name="Notes Placeholder 2"/>
+          <p:cNvSpPr>
+            <a:spLocks noGrp="1"/>
+          </p:cNvSpPr>
+          <p:nvPr>
+            <p:ph type="body" idx="3" sz="quarter"/>
+          </p:nvPr>
+        </p:nvSpPr>
+        <p:spPr/>
+        <p:txBody>
+          <a:bodyPr/>
+          <a:lstStyle/>
+          <a:p>
+            <a:r>
+              <a:t>Run from course repository root.</a:t>
+            </a:r>
+          </a:p>
+        </p:txBody>
+      </p:sp>
+      <p:sp>
+        <p:nvSpPr>
+          <p:cNvPr id="4" name="Slide Number Placeholder 3"/>
+          <p:cNvSpPr>
+            <a:spLocks noGrp="1"/>
+          </p:cNvSpPr>
+          <p:nvPr>
+            <p:ph type="sldNum" idx="5" sz="quarter"/>
+          </p:nvPr>
+        </p:nvSpPr>
+        <p:spPr/>
+      </p:sp>
+    </p:spTree>
+  </p:cSld>
+  <p:clrMapOvr>
+    <a:masterClrMapping/>
+  </p:clrMapOvr>
+</p:notes>
+</file>
+
+<file path=ppt/notesSlides/notesSlide11.xml><?xml version="1.0" encoding="utf-8"?>
+<p:notes xmlns:a="http://schemas.openxmlformats.org/drawingml/2006/main" xmlns:p="http://schemas.openxmlformats.org/presentationml/2006/main" xmlns:r="http://schemas.openxmlformats.org/officeDocument/2006/relationships">
+  <p:cSld>
+    <p:spTree>
+      <p:nvGrpSpPr>
+        <p:cNvPr id="1" name=""/>
+        <p:cNvGrpSpPr/>
+        <p:nvPr/>
+      </p:nvGrpSpPr>
+      <p:grpSpPr>
+        <a:xfrm>
+          <a:off x="0" y="0"/>
+          <a:ext cx="0" cy="0"/>
+          <a:chOff x="0" y="0"/>
+          <a:chExt cx="0" cy="0"/>
+        </a:xfrm>
+      </p:grpSpPr>
+      <p:sp>
+        <p:nvSpPr>
+          <p:cNvPr id="2" name="Slide Image Placeholder 1"/>
+          <p:cNvSpPr>
+            <a:spLocks noGrp="1"/>
+          </p:cNvSpPr>
+          <p:nvPr>
+            <p:ph type="sldImg" idx="2"/>
+          </p:nvPr>
+        </p:nvSpPr>
+        <p:spPr/>
+      </p:sp>
+      <p:sp>
+        <p:nvSpPr>
+          <p:cNvPr id="3" name="Notes Placeholder 2"/>
+          <p:cNvSpPr>
+            <a:spLocks noGrp="1"/>
+          </p:cNvSpPr>
+          <p:nvPr>
+            <p:ph type="body" idx="3" sz="quarter"/>
+          </p:nvPr>
+        </p:nvSpPr>
+        <p:spPr/>
+        <p:txBody>
+          <a:bodyPr/>
+          <a:lstStyle/>
+          <a:p>
+            <a:r>
+              <a:t>module4/examples/examples/uart_uvm/README.md</a:t>
+            </a:r>
+          </a:p>
+        </p:txBody>
+      </p:sp>
+      <p:sp>
+        <p:nvSpPr>
+          <p:cNvPr id="4" name="Slide Number Placeholder 3"/>
+          <p:cNvSpPr>
+            <a:spLocks noGrp="1"/>
+          </p:cNvSpPr>
+          <p:nvPr>
+            <p:ph type="sldNum" idx="5" sz="quarter"/>
+          </p:nvPr>
+        </p:nvSpPr>
+        <p:spPr/>
+      </p:sp>
+    </p:spTree>
+  </p:cSld>
+  <p:clrMapOvr>
+    <a:masterClrMapping/>
+  </p:clrMapOvr>
+</p:notes>
+</file>
+
+<file path=ppt/notesSlides/notesSlide12.xml><?xml version="1.0" encoding="utf-8"?>
+<p:notes xmlns:a="http://schemas.openxmlformats.org/drawingml/2006/main" xmlns:p="http://schemas.openxmlformats.org/presentationml/2006/main" xmlns:r="http://schemas.openxmlformats.org/officeDocument/2006/relationships">
+  <p:cSld>
+    <p:spTree>
+      <p:nvGrpSpPr>
+        <p:cNvPr id="1" name=""/>
+        <p:cNvGrpSpPr/>
+        <p:nvPr/>
+      </p:nvGrpSpPr>
+      <p:grpSpPr>
+        <a:xfrm>
+          <a:off x="0" y="0"/>
+          <a:ext cx="0" cy="0"/>
+          <a:chOff x="0" y="0"/>
+          <a:chExt cx="0" cy="0"/>
+        </a:xfrm>
+      </p:grpSpPr>
+      <p:sp>
+        <p:nvSpPr>
+          <p:cNvPr id="2" name="Slide Image Placeholder 1"/>
+          <p:cNvSpPr>
+            <a:spLocks noGrp="1"/>
+          </p:cNvSpPr>
+          <p:nvPr>
+            <p:ph type="sldImg" idx="2"/>
+          </p:nvPr>
+        </p:nvSpPr>
+        <p:spPr/>
+      </p:sp>
+      <p:sp>
+        <p:nvSpPr>
+          <p:cNvPr id="3" name="Notes Placeholder 2"/>
+          <p:cNvSpPr>
+            <a:spLocks noGrp="1"/>
+          </p:cNvSpPr>
+          <p:nvPr>
+            <p:ph type="body" idx="3" sz="quarter"/>
+          </p:nvPr>
+        </p:nvSpPr>
+        <p:spPr/>
+        <p:txBody>
+          <a:bodyPr/>
+          <a:lstStyle/>
+          <a:p>
+            <a:r>
+              <a:t>Hands-on: module4/examples/examples/uart_uvm/</a:t>
+            </a:r>
+          </a:p>
+        </p:txBody>
+      </p:sp>
+      <p:sp>
+        <p:nvSpPr>
+          <p:cNvPr id="4" name="Slide Number Placeholder 3"/>
+          <p:cNvSpPr>
+            <a:spLocks noGrp="1"/>
+          </p:cNvSpPr>
+          <p:nvPr>
+            <p:ph type="sldNum" idx="5" sz="quarter"/>
+          </p:nvPr>
+        </p:nvSpPr>
+        <p:spPr/>
+      </p:sp>
+    </p:spTree>
+  </p:cSld>
+  <p:clrMapOvr>
+    <a:masterClrMapping/>
+  </p:clrMapOvr>
+</p:notes>
+</file>
+
+<file path=ppt/notesSlides/notesSlide13.xml><?xml version="1.0" encoding="utf-8"?>
+<p:notes xmlns:a="http://schemas.openxmlformats.org/drawingml/2006/main" xmlns:p="http://schemas.openxmlformats.org/presentationml/2006/main" xmlns:r="http://schemas.openxmlformats.org/officeDocument/2006/relationships">
+  <p:cSld>
+    <p:spTree>
+      <p:nvGrpSpPr>
+        <p:cNvPr id="1" name=""/>
+        <p:cNvGrpSpPr/>
+        <p:nvPr/>
+      </p:nvGrpSpPr>
+      <p:grpSpPr>
+        <a:xfrm>
+          <a:off x="0" y="0"/>
+          <a:ext cx="0" cy="0"/>
+          <a:chOff x="0" y="0"/>
+          <a:chExt cx="0" cy="0"/>
+        </a:xfrm>
+      </p:grpSpPr>
+      <p:sp>
+        <p:nvSpPr>
+          <p:cNvPr id="2" name="Slide Image Placeholder 1"/>
+          <p:cNvSpPr>
+            <a:spLocks noGrp="1"/>
+          </p:cNvSpPr>
+          <p:nvPr>
+            <p:ph type="sldImg" idx="2"/>
+          </p:nvPr>
+        </p:nvSpPr>
+        <p:spPr/>
+      </p:sp>
+      <p:sp>
+        <p:nvSpPr>
+          <p:cNvPr id="3" name="Notes Placeholder 2"/>
+          <p:cNvSpPr>
+            <a:spLocks noGrp="1"/>
+          </p:cNvSpPr>
+          <p:nvPr>
+            <p:ph type="body" idx="3" sz="quarter"/>
+          </p:nvPr>
+        </p:nvSpPr>
+        <p:spPr/>
+        <p:txBody>
+          <a:bodyPr/>
+          <a:lstStyle/>
+          <a:p>
+            <a:r>
+              <a:t>From MODULE4 Learning Outcomes.</a:t>
             </a:r>
           </a:p>
         </p:txBody>
@@ -588,7 +882,7 @@
           <a:lstStyle/>
           <a:p>
             <a:r>
-              <a:t>From MODULE4 Topics Covered.</a:t>
+              <a:t>From MODULE4 Design Architecture.</a:t>
             </a:r>
           </a:p>
         </p:txBody>
@@ -658,7 +952,7 @@
           <a:lstStyle/>
           <a:p>
             <a:r>
-              <a:t>From MODULE4 Topics Covered.</a:t>
+              <a:t>From MODULE4 Design Architecture.</a:t>
             </a:r>
           </a:p>
         </p:txBody>
@@ -728,7 +1022,7 @@
           <a:lstStyle/>
           <a:p>
             <a:r>
-              <a:t>Run from course repository root.</a:t>
+              <a:t>From MODULE4 Design Architecture.</a:t>
             </a:r>
           </a:p>
         </p:txBody>
@@ -798,7 +1092,7 @@
           <a:lstStyle/>
           <a:p>
             <a:r>
-              <a:t>module4/examples/uart_uvm/README.md</a:t>
+              <a:t>From MODULE4 Verification &amp; Testing Methods.</a:t>
             </a:r>
           </a:p>
         </p:txBody>
@@ -868,7 +1162,217 @@
           <a:lstStyle/>
           <a:p>
             <a:r>
-              <a:t>Hands-on: module4/examples/uart_uvm/</a:t>
+              <a:t>From MODULE4 Verification &amp; Testing Methods.</a:t>
+            </a:r>
+          </a:p>
+        </p:txBody>
+      </p:sp>
+      <p:sp>
+        <p:nvSpPr>
+          <p:cNvPr id="4" name="Slide Number Placeholder 3"/>
+          <p:cNvSpPr>
+            <a:spLocks noGrp="1"/>
+          </p:cNvSpPr>
+          <p:nvPr>
+            <p:ph type="sldNum" idx="5" sz="quarter"/>
+          </p:nvPr>
+        </p:nvSpPr>
+        <p:spPr/>
+      </p:sp>
+    </p:spTree>
+  </p:cSld>
+  <p:clrMapOvr>
+    <a:masterClrMapping/>
+  </p:clrMapOvr>
+</p:notes>
+</file>
+
+<file path=ppt/notesSlides/notesSlide7.xml><?xml version="1.0" encoding="utf-8"?>
+<p:notes xmlns:a="http://schemas.openxmlformats.org/drawingml/2006/main" xmlns:p="http://schemas.openxmlformats.org/presentationml/2006/main" xmlns:r="http://schemas.openxmlformats.org/officeDocument/2006/relationships">
+  <p:cSld>
+    <p:spTree>
+      <p:nvGrpSpPr>
+        <p:cNvPr id="1" name=""/>
+        <p:cNvGrpSpPr/>
+        <p:nvPr/>
+      </p:nvGrpSpPr>
+      <p:grpSpPr>
+        <a:xfrm>
+          <a:off x="0" y="0"/>
+          <a:ext cx="0" cy="0"/>
+          <a:chOff x="0" y="0"/>
+          <a:chExt cx="0" cy="0"/>
+        </a:xfrm>
+      </p:grpSpPr>
+      <p:sp>
+        <p:nvSpPr>
+          <p:cNvPr id="2" name="Slide Image Placeholder 1"/>
+          <p:cNvSpPr>
+            <a:spLocks noGrp="1"/>
+          </p:cNvSpPr>
+          <p:nvPr>
+            <p:ph type="sldImg" idx="2"/>
+          </p:nvPr>
+        </p:nvSpPr>
+        <p:spPr/>
+      </p:sp>
+      <p:sp>
+        <p:nvSpPr>
+          <p:cNvPr id="3" name="Notes Placeholder 2"/>
+          <p:cNvSpPr>
+            <a:spLocks noGrp="1"/>
+          </p:cNvSpPr>
+          <p:nvPr>
+            <p:ph type="body" idx="3" sz="quarter"/>
+          </p:nvPr>
+        </p:nvSpPr>
+        <p:spPr/>
+        <p:txBody>
+          <a:bodyPr/>
+          <a:lstStyle/>
+          <a:p>
+            <a:r>
+              <a:t>From MODULE4 Verification &amp; Testing Methods.</a:t>
+            </a:r>
+          </a:p>
+        </p:txBody>
+      </p:sp>
+      <p:sp>
+        <p:nvSpPr>
+          <p:cNvPr id="4" name="Slide Number Placeholder 3"/>
+          <p:cNvSpPr>
+            <a:spLocks noGrp="1"/>
+          </p:cNvSpPr>
+          <p:nvPr>
+            <p:ph type="sldNum" idx="5" sz="quarter"/>
+          </p:nvPr>
+        </p:nvSpPr>
+        <p:spPr/>
+      </p:sp>
+    </p:spTree>
+  </p:cSld>
+  <p:clrMapOvr>
+    <a:masterClrMapping/>
+  </p:clrMapOvr>
+</p:notes>
+</file>
+
+<file path=ppt/notesSlides/notesSlide8.xml><?xml version="1.0" encoding="utf-8"?>
+<p:notes xmlns:a="http://schemas.openxmlformats.org/drawingml/2006/main" xmlns:p="http://schemas.openxmlformats.org/presentationml/2006/main" xmlns:r="http://schemas.openxmlformats.org/officeDocument/2006/relationships">
+  <p:cSld>
+    <p:spTree>
+      <p:nvGrpSpPr>
+        <p:cNvPr id="1" name=""/>
+        <p:cNvGrpSpPr/>
+        <p:nvPr/>
+      </p:nvGrpSpPr>
+      <p:grpSpPr>
+        <a:xfrm>
+          <a:off x="0" y="0"/>
+          <a:ext cx="0" cy="0"/>
+          <a:chOff x="0" y="0"/>
+          <a:chExt cx="0" cy="0"/>
+        </a:xfrm>
+      </p:grpSpPr>
+      <p:sp>
+        <p:nvSpPr>
+          <p:cNvPr id="2" name="Slide Image Placeholder 1"/>
+          <p:cNvSpPr>
+            <a:spLocks noGrp="1"/>
+          </p:cNvSpPr>
+          <p:nvPr>
+            <p:ph type="sldImg" idx="2"/>
+          </p:nvPr>
+        </p:nvSpPr>
+        <p:spPr/>
+      </p:sp>
+      <p:sp>
+        <p:nvSpPr>
+          <p:cNvPr id="3" name="Notes Placeholder 2"/>
+          <p:cNvSpPr>
+            <a:spLocks noGrp="1"/>
+          </p:cNvSpPr>
+          <p:nvPr>
+            <p:ph type="body" idx="3" sz="quarter"/>
+          </p:nvPr>
+        </p:nvSpPr>
+        <p:spPr/>
+        <p:txBody>
+          <a:bodyPr/>
+          <a:lstStyle/>
+          <a:p>
+            <a:r>
+              <a:t>From MODULE4 Topics Covered.</a:t>
+            </a:r>
+          </a:p>
+        </p:txBody>
+      </p:sp>
+      <p:sp>
+        <p:nvSpPr>
+          <p:cNvPr id="4" name="Slide Number Placeholder 3"/>
+          <p:cNvSpPr>
+            <a:spLocks noGrp="1"/>
+          </p:cNvSpPr>
+          <p:nvPr>
+            <p:ph type="sldNum" idx="5" sz="quarter"/>
+          </p:nvPr>
+        </p:nvSpPr>
+        <p:spPr/>
+      </p:sp>
+    </p:spTree>
+  </p:cSld>
+  <p:clrMapOvr>
+    <a:masterClrMapping/>
+  </p:clrMapOvr>
+</p:notes>
+</file>
+
+<file path=ppt/notesSlides/notesSlide9.xml><?xml version="1.0" encoding="utf-8"?>
+<p:notes xmlns:a="http://schemas.openxmlformats.org/drawingml/2006/main" xmlns:p="http://schemas.openxmlformats.org/presentationml/2006/main" xmlns:r="http://schemas.openxmlformats.org/officeDocument/2006/relationships">
+  <p:cSld>
+    <p:spTree>
+      <p:nvGrpSpPr>
+        <p:cNvPr id="1" name=""/>
+        <p:cNvGrpSpPr/>
+        <p:nvPr/>
+      </p:nvGrpSpPr>
+      <p:grpSpPr>
+        <a:xfrm>
+          <a:off x="0" y="0"/>
+          <a:ext cx="0" cy="0"/>
+          <a:chOff x="0" y="0"/>
+          <a:chExt cx="0" cy="0"/>
+        </a:xfrm>
+      </p:grpSpPr>
+      <p:sp>
+        <p:nvSpPr>
+          <p:cNvPr id="2" name="Slide Image Placeholder 1"/>
+          <p:cNvSpPr>
+            <a:spLocks noGrp="1"/>
+          </p:cNvSpPr>
+          <p:nvPr>
+            <p:ph type="sldImg" idx="2"/>
+          </p:nvPr>
+        </p:nvSpPr>
+        <p:spPr/>
+      </p:sp>
+      <p:sp>
+        <p:nvSpPr>
+          <p:cNvPr id="3" name="Notes Placeholder 2"/>
+          <p:cNvSpPr>
+            <a:spLocks noGrp="1"/>
+          </p:cNvSpPr>
+          <p:nvPr>
+            <p:ph type="body" idx="3" sz="quarter"/>
+          </p:nvPr>
+        </p:nvSpPr>
+        <p:spPr/>
+        <p:txBody>
+          <a:bodyPr/>
+          <a:lstStyle/>
+          <a:p>
+            <a:r>
+              <a:t>From MODULE4 Topics Covered.</a:t>
             </a:r>
           </a:p>
         </p:txBody>
@@ -4000,8 +4504,8 @@
         </p:nvSpPr>
         <p:spPr>
           <a:xfrm>
-            <a:off x="548640" y="2743200"/>
-            <a:ext cx="11064240" cy="1371600"/>
+            <a:off x="548640" y="411480"/>
+            <a:ext cx="11064240" cy="777240"/>
           </a:xfrm>
           <a:prstGeom prst="rect">
             <a:avLst/>
@@ -4014,11 +4518,11 @@
           </a:bodyPr>
           <a:lstStyle/>
           <a:p>
-            <a:pPr algn="ctr">
-              <a:lnSpc>
-                <a:spcPts val="2200"/>
-              </a:lnSpc>
-              <a:defRPr sz="3600" b="1">
+            <a:pPr>
+              <a:lnSpc>
+                <a:spcPts val="2200"/>
+              </a:lnSpc>
+              <a:defRPr sz="2800" b="1">
                 <a:solidFill>
                   <a:srgbClr val="1A1A2E"/>
                 </a:solidFill>
@@ -4026,14 +4530,77 @@
               </a:defRPr>
             </a:pPr>
             <a:r>
-              <a:t>Hands-on examples</a:t>
-            </a:r>
-          </a:p>
-        </p:txBody>
-      </p:sp>
-      <p:sp>
-        <p:nvSpPr>
-          <p:cNvPr id="3" name="TextBox 2"/>
+              <a:t>Verification environment architecture</a:t>
+            </a:r>
+          </a:p>
+        </p:txBody>
+      </p:sp>
+      <p:pic>
+        <p:nvPicPr>
+          <p:cNvPr id="3" name="Picture 2" descr="verification_architecture.png"/>
+          <p:cNvPicPr>
+            <a:picLocks noChangeAspect="1"/>
+          </p:cNvPicPr>
+          <p:nvPr/>
+        </p:nvPicPr>
+        <p:blipFill>
+          <a:blip r:embed="rId2"/>
+          <a:stretch>
+            <a:fillRect/>
+          </a:stretch>
+        </p:blipFill>
+        <p:spPr>
+          <a:xfrm>
+            <a:off x="548640" y="1143000"/>
+            <a:ext cx="8128000" cy="4572000"/>
+          </a:xfrm>
+          <a:prstGeom prst="rect">
+            <a:avLst/>
+          </a:prstGeom>
+        </p:spPr>
+      </p:pic>
+      <p:sp>
+        <p:nvSpPr>
+          <p:cNvPr id="4" name="TextBox 3"/>
+          <p:cNvSpPr txBox="1"/>
+          <p:nvPr/>
+        </p:nvSpPr>
+        <p:spPr>
+          <a:xfrm>
+            <a:off x="548640" y="5897880"/>
+            <a:ext cx="11064240" cy="411480"/>
+          </a:xfrm>
+          <a:prstGeom prst="rect">
+            <a:avLst/>
+          </a:prstGeom>
+          <a:noFill/>
+        </p:spPr>
+        <p:txBody>
+          <a:bodyPr wrap="square">
+            <a:noAutofit/>
+          </a:bodyPr>
+          <a:lstStyle/>
+          <a:p>
+            <a:pPr>
+              <a:lnSpc>
+                <a:spcPts val="2200"/>
+              </a:lnSpc>
+              <a:defRPr sz="1200" b="0">
+                <a:solidFill>
+                  <a:srgbClr val="333333"/>
+                </a:solidFill>
+                <a:latin typeface="Calibri"/>
+              </a:defRPr>
+            </a:pPr>
+            <a:r>
+              <a:t>Module 4: UVM layers, agents, and checkers for this phase.</a:t>
+            </a:r>
+          </a:p>
+        </p:txBody>
+      </p:sp>
+      <p:sp>
+        <p:nvSpPr>
+          <p:cNvPr id="5" name="TextBox 4"/>
           <p:cNvSpPr txBox="1"/>
           <p:nvPr/>
         </p:nvSpPr>
@@ -4122,7 +4689,7 @@
               </a:defRPr>
             </a:pPr>
             <a:r>
-              <a:t>Module 4 self-check</a:t>
+              <a:t>1. UART DUT (reused from Module 3)</a:t>
             </a:r>
           </a:p>
         </p:txBody>
@@ -4135,15 +4702,13 @@
         </p:nvSpPr>
         <p:spPr>
           <a:xfrm>
-            <a:off x="548640" y="1051560"/>
-            <a:ext cx="11064240" cy="914400"/>
+            <a:off x="548640" y="1234440"/>
+            <a:ext cx="11064240" cy="4937760"/>
           </a:xfrm>
           <a:prstGeom prst="rect">
             <a:avLst/>
           </a:prstGeom>
-          <a:solidFill>
-            <a:srgbClr val="F4F4F4"/>
-          </a:solidFill>
+          <a:noFill/>
         </p:spPr>
         <p:txBody>
           <a:bodyPr wrap="square">
@@ -4156,48 +4721,100 @@
                 <a:spcPts val="2200"/>
               </a:lnSpc>
               <a:spcAft>
-                <a:spcPts val="200"/>
+                <a:spcPts val="1000"/>
               </a:spcAft>
               <a:defRPr sz="2000" b="0">
                 <a:solidFill>
                   <a:srgbClr val="333333"/>
                 </a:solidFill>
-                <a:latin typeface="Consolas"/>
-              </a:defRPr>
-            </a:pPr>
-            <a:r>
-              <a:t>$ ./scripts/module4.sh --check</a:t>
-            </a:r>
-          </a:p>
-        </p:txBody>
-      </p:sp>
-      <p:pic>
-        <p:nvPicPr>
-          <p:cNvPr id="4" name="Picture 3" descr="module4_check.png"/>
-          <p:cNvPicPr>
-            <a:picLocks noChangeAspect="1"/>
-          </p:cNvPicPr>
-          <p:nvPr/>
-        </p:nvPicPr>
-        <p:blipFill>
-          <a:blip r:embed="rId2"/>
-          <a:stretch>
-            <a:fillRect/>
-          </a:stretch>
-        </p:blipFill>
-        <p:spPr>
-          <a:xfrm>
-            <a:off x="548640" y="1965960"/>
-            <a:ext cx="7071358" cy="3977639"/>
-          </a:xfrm>
-          <a:prstGeom prst="rect">
-            <a:avLst/>
-          </a:prstGeom>
-        </p:spPr>
-      </p:pic>
-      <p:sp>
-        <p:nvSpPr>
-          <p:cNvPr id="5" name="TextBox 4"/>
+                <a:latin typeface="Calibri"/>
+              </a:defRPr>
+            </a:pPr>
+            <a:r>
+              <a:t>• dut/: `uart_tx`, `uart_rx`, `baud_gen` — identical</a:t>
+            </a:r>
+          </a:p>
+          <a:p>
+            <a:pPr>
+              <a:lnSpc>
+                <a:spcPts val="2200"/>
+              </a:lnSpc>
+              <a:spcAft>
+                <a:spcPts val="1000"/>
+              </a:spcAft>
+              <a:defRPr sz="2000" b="0">
+                <a:solidFill>
+                  <a:srgbClr val="333333"/>
+                </a:solidFill>
+                <a:latin typeface="Calibri"/>
+              </a:defRPr>
+            </a:pPr>
+            <a:r>
+              <a:t>      RTL to `uart_baseline`.</a:t>
+            </a:r>
+          </a:p>
+          <a:p>
+            <a:pPr>
+              <a:lnSpc>
+                <a:spcPts val="2200"/>
+              </a:lnSpc>
+              <a:spcAft>
+                <a:spcPts val="1000"/>
+              </a:spcAft>
+              <a:defRPr sz="2000" b="0">
+                <a:solidFill>
+                  <a:srgbClr val="333333"/>
+                </a:solidFill>
+                <a:latin typeface="Calibri"/>
+              </a:defRPr>
+            </a:pPr>
+            <a:r>
+              <a:t>• Loopback in top: `rx = tx` for closed-loop checking.</a:t>
+            </a:r>
+          </a:p>
+          <a:p>
+            <a:pPr>
+              <a:lnSpc>
+                <a:spcPts val="2200"/>
+              </a:lnSpc>
+              <a:spcAft>
+                <a:spcPts val="1000"/>
+              </a:spcAft>
+              <a:defRPr sz="2000" b="0">
+                <a:solidFill>
+                  <a:srgbClr val="333333"/>
+                </a:solidFill>
+                <a:latin typeface="Calibri"/>
+              </a:defRPr>
+            </a:pPr>
+            <a:r>
+              <a:t>• Why reuse: Upgrade verification (UVM) without</a:t>
+            </a:r>
+          </a:p>
+          <a:p>
+            <a:pPr>
+              <a:lnSpc>
+                <a:spcPts val="2200"/>
+              </a:lnSpc>
+              <a:spcAft>
+                <a:spcPts val="1000"/>
+              </a:spcAft>
+              <a:defRPr sz="2000" b="0">
+                <a:solidFill>
+                  <a:srgbClr val="333333"/>
+                </a:solidFill>
+                <a:latin typeface="Calibri"/>
+              </a:defRPr>
+            </a:pPr>
+            <a:r>
+              <a:t>      touching proven RTL.</a:t>
+            </a:r>
+          </a:p>
+        </p:txBody>
+      </p:sp>
+      <p:sp>
+        <p:nvSpPr>
+          <p:cNvPr id="4" name="TextBox 3"/>
           <p:cNvSpPr txBox="1"/>
           <p:nvPr/>
         </p:nvSpPr>
@@ -4286,7 +4903,7 @@
               </a:defRPr>
             </a:pPr>
             <a:r>
-              <a:t>Example 1: UART UVM</a:t>
+              <a:t>2. UVM testbench hierarchy</a:t>
             </a:r>
           </a:p>
         </p:txBody>
@@ -4328,7 +4945,7 @@
               </a:defRPr>
             </a:pPr>
             <a:r>
-              <a:t>• UVM phases and reporting (DRIVER, MONITOR,</a:t>
+              <a:t>• uart_tx_if: virtual interface for driver/monitor.</a:t>
             </a:r>
           </a:p>
           <a:p>
@@ -4347,7 +4964,7 @@
               </a:defRPr>
             </a:pPr>
             <a:r>
-              <a:t>      SCOREBOARD).</a:t>
+              <a:t>• UartTxTransaction / Sequence / Driver / Monitor /</a:t>
             </a:r>
           </a:p>
           <a:p>
@@ -4366,7 +4983,7 @@
               </a:defRPr>
             </a:pPr>
             <a:r>
-              <a:t>• TX and RX scoreboard checks (TX: monitor observes</a:t>
+              <a:t>      Scoreboard / Agent / Env / Test — same pattern as…</a:t>
             </a:r>
           </a:p>
           <a:p>
@@ -4385,7 +5002,7 @@
               </a:defRPr>
             </a:pPr>
             <a:r>
-              <a:t>      serial line; RX: loopback byte checked via scoreb…</a:t>
+              <a:t>• Monitor reconstructs bytes from the serial `tx` line</a:t>
             </a:r>
           </a:p>
           <a:p>
@@ -4404,26 +5021,7 @@
               </a:defRPr>
             </a:pPr>
             <a:r>
-              <a:t>• Final scoreboard summary (TX/RX matches and</a:t>
-            </a:r>
-          </a:p>
-          <a:p>
-            <a:pPr>
-              <a:lnSpc>
-                <a:spcPts val="2200"/>
-              </a:lnSpc>
-              <a:spcAft>
-                <a:spcPts val="1000"/>
-              </a:spcAft>
-              <a:defRPr sz="2000" b="0">
-                <a:solidFill>
-                  <a:srgbClr val="333333"/>
-                </a:solidFill>
-                <a:latin typeface="Calibri"/>
-              </a:defRPr>
-            </a:pPr>
-            <a:r>
-              <a:t>      mismatches).</a:t>
+              <a:t>      using UART 8N1 rules.</a:t>
             </a:r>
           </a:p>
         </p:txBody>
@@ -4519,7 +5117,7 @@
               </a:defRPr>
             </a:pPr>
             <a:r>
-              <a:t>Demo: UART UVM</a:t>
+              <a:t>3. Dual check paths</a:t>
             </a:r>
           </a:p>
         </p:txBody>
@@ -4532,15 +5130,13 @@
         </p:nvSpPr>
         <p:spPr>
           <a:xfrm>
-            <a:off x="548640" y="1051560"/>
-            <a:ext cx="11064240" cy="914400"/>
+            <a:off x="548640" y="1234440"/>
+            <a:ext cx="11064240" cy="4937760"/>
           </a:xfrm>
           <a:prstGeom prst="rect">
             <a:avLst/>
           </a:prstGeom>
-          <a:solidFill>
-            <a:srgbClr val="F4F4F4"/>
-          </a:solidFill>
+          <a:noFill/>
         </p:spPr>
         <p:txBody>
           <a:bodyPr wrap="square">
@@ -4553,48 +5149,81 @@
                 <a:spcPts val="2200"/>
               </a:lnSpc>
               <a:spcAft>
-                <a:spcPts val="200"/>
+                <a:spcPts val="1000"/>
               </a:spcAft>
               <a:defRPr sz="2000" b="0">
                 <a:solidFill>
                   <a:srgbClr val="333333"/>
                 </a:solidFill>
-                <a:latin typeface="Consolas"/>
-              </a:defRPr>
-            </a:pPr>
-            <a:r>
-              <a:t>$ ./scripts/module4.sh --run</a:t>
-            </a:r>
-          </a:p>
-        </p:txBody>
-      </p:sp>
-      <p:pic>
-        <p:nvPicPr>
-          <p:cNvPr id="4" name="Picture 3" descr="ex01_uart_uvm.png"/>
-          <p:cNvPicPr>
-            <a:picLocks noChangeAspect="1"/>
-          </p:cNvPicPr>
-          <p:nvPr/>
-        </p:nvPicPr>
-        <p:blipFill>
-          <a:blip r:embed="rId2"/>
-          <a:stretch>
-            <a:fillRect/>
-          </a:stretch>
-        </p:blipFill>
-        <p:spPr>
-          <a:xfrm>
-            <a:off x="548640" y="1965960"/>
-            <a:ext cx="7071358" cy="3977639"/>
-          </a:xfrm>
-          <a:prstGeom prst="rect">
-            <a:avLst/>
-          </a:prstGeom>
-        </p:spPr>
-      </p:pic>
-      <p:sp>
-        <p:nvSpPr>
-          <p:cNvPr id="5" name="TextBox 4"/>
+                <a:latin typeface="Calibri"/>
+              </a:defRPr>
+            </a:pPr>
+            <a:r>
+              <a:t>• TX path: sequence → driver → DUT → monitor →</a:t>
+            </a:r>
+          </a:p>
+          <a:p>
+            <a:pPr>
+              <a:lnSpc>
+                <a:spcPts val="2200"/>
+              </a:lnSpc>
+              <a:spcAft>
+                <a:spcPts val="1000"/>
+              </a:spcAft>
+              <a:defRPr sz="2000" b="0">
+                <a:solidFill>
+                  <a:srgbClr val="333333"/>
+                </a:solidFill>
+                <a:latin typeface="Calibri"/>
+              </a:defRPr>
+            </a:pPr>
+            <a:r>
+              <a:t>      scoreboard (`observed_tx`).</a:t>
+            </a:r>
+          </a:p>
+          <a:p>
+            <a:pPr>
+              <a:lnSpc>
+                <a:spcPts val="2200"/>
+              </a:lnSpc>
+              <a:spcAft>
+                <a:spcPts val="1000"/>
+              </a:spcAft>
+              <a:defRPr sz="2000" b="0">
+                <a:solidFill>
+                  <a:srgbClr val="333333"/>
+                </a:solidFill>
+                <a:latin typeface="Calibri"/>
+              </a:defRPr>
+            </a:pPr>
+            <a:r>
+              <a:t>• RX path: loopback into `uart_rx`; `check_rx_byte()`</a:t>
+            </a:r>
+          </a:p>
+          <a:p>
+            <a:pPr>
+              <a:lnSpc>
+                <a:spcPts val="2200"/>
+              </a:lnSpc>
+              <a:spcAft>
+                <a:spcPts val="1000"/>
+              </a:spcAft>
+              <a:defRPr sz="2000" b="0">
+                <a:solidFill>
+                  <a:srgbClr val="333333"/>
+                </a:solidFill>
+                <a:latin typeface="Calibri"/>
+              </a:defRPr>
+            </a:pPr>
+            <a:r>
+              <a:t>      when `data_valid` asserts.</a:t>
+            </a:r>
+          </a:p>
+        </p:txBody>
+      </p:sp>
+      <p:sp>
+        <p:nvSpPr>
+          <p:cNvPr id="4" name="TextBox 3"/>
           <p:cNvSpPr txBox="1"/>
           <p:nvPr/>
         </p:nvSpPr>
@@ -4683,7 +5312,7 @@
               </a:defRPr>
             </a:pPr>
             <a:r>
-              <a:t>Practice &amp; assessment</a:t>
+              <a:t>Verification &amp; testing methods</a:t>
             </a:r>
           </a:p>
         </p:txBody>
@@ -4779,21 +5408,45 @@
               </a:defRPr>
             </a:pPr>
             <a:r>
-              <a:t>Exercises</a:t>
-            </a:r>
-          </a:p>
-        </p:txBody>
-      </p:sp>
-      <p:sp>
-        <p:nvSpPr>
-          <p:cNvPr id="3" name="TextBox 2"/>
+              <a:t>Testing and closure flow</a:t>
+            </a:r>
+          </a:p>
+        </p:txBody>
+      </p:sp>
+      <p:pic>
+        <p:nvPicPr>
+          <p:cNvPr id="3" name="Picture 2" descr="testing_methods.png"/>
+          <p:cNvPicPr>
+            <a:picLocks noChangeAspect="1"/>
+          </p:cNvPicPr>
+          <p:nvPr/>
+        </p:nvPicPr>
+        <p:blipFill>
+          <a:blip r:embed="rId2"/>
+          <a:stretch>
+            <a:fillRect/>
+          </a:stretch>
+        </p:blipFill>
+        <p:spPr>
+          <a:xfrm>
+            <a:off x="548640" y="1143000"/>
+            <a:ext cx="8128000" cy="4572000"/>
+          </a:xfrm>
+          <a:prstGeom prst="rect">
+            <a:avLst/>
+          </a:prstGeom>
+        </p:spPr>
+      </p:pic>
+      <p:sp>
+        <p:nvSpPr>
+          <p:cNvPr id="4" name="TextBox 3"/>
           <p:cNvSpPr txBox="1"/>
           <p:nvPr/>
         </p:nvSpPr>
         <p:spPr>
           <a:xfrm>
-            <a:off x="548640" y="1234440"/>
-            <a:ext cx="11064240" cy="4937760"/>
+            <a:off x="548640" y="5897880"/>
+            <a:ext cx="11064240" cy="411480"/>
           </a:xfrm>
           <a:prstGeom prst="rect">
             <a:avLst/>
@@ -4810,10 +5463,7 @@
               <a:lnSpc>
                 <a:spcPts val="2200"/>
               </a:lnSpc>
-              <a:spcAft>
-                <a:spcPts val="1000"/>
-              </a:spcAft>
-              <a:defRPr sz="2000" b="0">
+              <a:defRPr sz="1200" b="0">
                 <a:solidFill>
                   <a:srgbClr val="333333"/>
                 </a:solidFill>
@@ -4821,71 +5471,14 @@
               </a:defRPr>
             </a:pPr>
             <a:r>
-              <a:t>• Run uart_uvm</a:t>
-            </a:r>
-          </a:p>
-          <a:p>
-            <a:pPr>
-              <a:lnSpc>
-                <a:spcPts val="2200"/>
-              </a:lnSpc>
-              <a:spcAft>
-                <a:spcPts val="1000"/>
-              </a:spcAft>
-              <a:defRPr sz="2000" b="0">
-                <a:solidFill>
-                  <a:srgbClr val="333333"/>
-                </a:solidFill>
-                <a:latin typeface="Calibri"/>
-              </a:defRPr>
-            </a:pPr>
-            <a:r>
-              <a:t>• Trace one transaction</a:t>
-            </a:r>
-          </a:p>
-          <a:p>
-            <a:pPr>
-              <a:lnSpc>
-                <a:spcPts val="2200"/>
-              </a:lnSpc>
-              <a:spcAft>
-                <a:spcPts val="1000"/>
-              </a:spcAft>
-              <a:defRPr sz="2000" b="0">
-                <a:solidFill>
-                  <a:srgbClr val="333333"/>
-                </a:solidFill>
-                <a:latin typeface="Calibri"/>
-              </a:defRPr>
-            </a:pPr>
-            <a:r>
-              <a:t>• Change the sequence</a:t>
-            </a:r>
-          </a:p>
-          <a:p>
-            <a:pPr>
-              <a:lnSpc>
-                <a:spcPts val="2200"/>
-              </a:lnSpc>
-              <a:spcAft>
-                <a:spcPts val="1000"/>
-              </a:spcAft>
-              <a:defRPr sz="2000" b="0">
-                <a:solidFill>
-                  <a:srgbClr val="333333"/>
-                </a:solidFill>
-                <a:latin typeface="Calibri"/>
-              </a:defRPr>
-            </a:pPr>
-            <a:r>
-              <a:t>• Optional: Loopback path</a:t>
-            </a:r>
-          </a:p>
-        </p:txBody>
-      </p:sp>
-      <p:sp>
-        <p:nvSpPr>
-          <p:cNvPr id="4" name="TextBox 3"/>
+              <a:t>Module 4: how tests, checks, and metrics close verification goals.</a:t>
+            </a:r>
+          </a:p>
+        </p:txBody>
+      </p:sp>
+      <p:sp>
+        <p:nvSpPr>
+          <p:cNvPr id="5" name="TextBox 4"/>
           <p:cNvSpPr txBox="1"/>
           <p:nvPr/>
         </p:nvSpPr>
@@ -4974,7 +5567,7 @@
               </a:defRPr>
             </a:pPr>
             <a:r>
-              <a:t>Assessment checklist</a:t>
+              <a:t>1. Directed UART regression</a:t>
             </a:r>
           </a:p>
         </p:txBody>
@@ -5016,7 +5609,7 @@
               </a:defRPr>
             </a:pPr>
             <a:r>
-              <a:t>• Can describe the UART UVM agent: transaction (one</a:t>
+              <a:t>• Sequence sends 0x00, 0x01, 0x55, 0xAA, 0xFF —</a:t>
             </a:r>
           </a:p>
           <a:p>
@@ -5035,121 +5628,7 @@
               </a:defRPr>
             </a:pPr>
             <a:r>
-              <a:t>      byte), sequence, driver, monitor, scoreboard.</a:t>
-            </a:r>
-          </a:p>
-          <a:p>
-            <a:pPr>
-              <a:lnSpc>
-                <a:spcPts val="2200"/>
-              </a:lnSpc>
-              <a:spcAft>
-                <a:spcPts val="1000"/>
-              </a:spcAft>
-              <a:defRPr sz="2000" b="0">
-                <a:solidFill>
-                  <a:srgbClr val="333333"/>
-                </a:solidFill>
-                <a:latin typeface="Calibri"/>
-              </a:defRPr>
-            </a:pPr>
-            <a:r>
-              <a:t>• Can explain loopback and how TX and RX are both</a:t>
-            </a:r>
-          </a:p>
-          <a:p>
-            <a:pPr>
-              <a:lnSpc>
-                <a:spcPts val="2200"/>
-              </a:lnSpc>
-              <a:spcAft>
-                <a:spcPts val="1000"/>
-              </a:spcAft>
-              <a:defRPr sz="2000" b="0">
-                <a:solidFill>
-                  <a:srgbClr val="333333"/>
-                </a:solidFill>
-                <a:latin typeface="Calibri"/>
-              </a:defRPr>
-            </a:pPr>
-            <a:r>
-              <a:t>      checked.</a:t>
-            </a:r>
-          </a:p>
-          <a:p>
-            <a:pPr>
-              <a:lnSpc>
-                <a:spcPts val="2200"/>
-              </a:lnSpc>
-              <a:spcAft>
-                <a:spcPts val="1000"/>
-              </a:spcAft>
-              <a:defRPr sz="2000" b="0">
-                <a:solidFill>
-                  <a:srgbClr val="333333"/>
-                </a:solidFill>
-                <a:latin typeface="Calibri"/>
-              </a:defRPr>
-            </a:pPr>
-            <a:r>
-              <a:t>• Can run uart_uvm and interpret UVM output (phases,</a:t>
-            </a:r>
-          </a:p>
-          <a:p>
-            <a:pPr>
-              <a:lnSpc>
-                <a:spcPts val="2200"/>
-              </a:lnSpc>
-              <a:spcAft>
-                <a:spcPts val="1000"/>
-              </a:spcAft>
-              <a:defRPr sz="2000" b="0">
-                <a:solidFill>
-                  <a:srgbClr val="333333"/>
-                </a:solidFill>
-                <a:latin typeface="Calibri"/>
-              </a:defRPr>
-            </a:pPr>
-            <a:r>
-              <a:t>      scoreboard summary).</a:t>
-            </a:r>
-          </a:p>
-          <a:p>
-            <a:pPr>
-              <a:lnSpc>
-                <a:spcPts val="2200"/>
-              </a:lnSpc>
-              <a:spcAft>
-                <a:spcPts val="1000"/>
-              </a:spcAft>
-              <a:defRPr sz="2000" b="0">
-                <a:solidFill>
-                  <a:srgbClr val="333333"/>
-                </a:solidFill>
-                <a:latin typeface="Calibri"/>
-              </a:defRPr>
-            </a:pPr>
-            <a:r>
-              <a:t>• Ready for Module 5: SPI protocol + RTL + basic</a:t>
-            </a:r>
-          </a:p>
-          <a:p>
-            <a:pPr>
-              <a:lnSpc>
-                <a:spcPts val="2200"/>
-              </a:lnSpc>
-              <a:spcAft>
-                <a:spcPts val="1000"/>
-              </a:spcAft>
-              <a:defRPr sz="2000" b="0">
-                <a:solidFill>
-                  <a:srgbClr val="333333"/>
-                </a:solidFill>
-                <a:latin typeface="Calibri"/>
-              </a:defRPr>
-            </a:pPr>
-            <a:r>
-              <a:t>      testbench.</a:t>
+              <a:t>      repeatable regression before randomization.</a:t>
             </a:r>
           </a:p>
         </p:txBody>
@@ -5245,7 +5724,7 @@
               </a:defRPr>
             </a:pPr>
             <a:r>
-              <a:t>Summary &amp; next steps</a:t>
+              <a:t>2. Scoreboard strategy</a:t>
             </a:r>
           </a:p>
         </p:txBody>
@@ -5287,7 +5766,7 @@
               </a:defRPr>
             </a:pPr>
             <a:r>
-              <a:t>• Extend UART verification to **UVM+SV** — UART agent</a:t>
+              <a:t>• Expected queue loaded in test; compare to monitor-</a:t>
             </a:r>
           </a:p>
           <a:p>
@@ -5306,7 +5785,7 @@
               </a:defRPr>
             </a:pPr>
             <a:r>
-              <a:t>      (transaction, sequence, driver, monitor, scoreb…</a:t>
+              <a:t>      reconstructed TX and to RX hook data.</a:t>
             </a:r>
           </a:p>
           <a:p>
@@ -5325,7 +5804,7 @@
               </a:defRPr>
             </a:pPr>
             <a:r>
-              <a:t>• Complete module4/CHECKLIST.md</a:t>
+              <a:t>• Fail fast on mismatch; read UVM SCOREBOARD summary</a:t>
             </a:r>
           </a:p>
           <a:p>
@@ -5344,9 +5823,128 @@
               </a:defRPr>
             </a:pPr>
             <a:r>
-              <a:t>• Run ./scripts/module4.sh --check</a:t>
-            </a:r>
-          </a:p>
+              <a:t>      at end of run.</a:t>
+            </a:r>
+          </a:p>
+        </p:txBody>
+      </p:sp>
+      <p:sp>
+        <p:nvSpPr>
+          <p:cNvPr id="4" name="TextBox 3"/>
+          <p:cNvSpPr txBox="1"/>
+          <p:nvPr/>
+        </p:nvSpPr>
+        <p:spPr>
+          <a:xfrm>
+            <a:off x="548640" y="6355080"/>
+            <a:ext cx="11064240" cy="320040"/>
+          </a:xfrm>
+          <a:prstGeom prst="rect">
+            <a:avLst/>
+          </a:prstGeom>
+          <a:noFill/>
+        </p:spPr>
+        <p:txBody>
+          <a:bodyPr wrap="square">
+            <a:noAutofit/>
+          </a:bodyPr>
+          <a:lstStyle/>
+          <a:p>
+            <a:pPr algn="r">
+              <a:lnSpc>
+                <a:spcPts val="2200"/>
+              </a:lnSpc>
+              <a:defRPr sz="1000" b="0">
+                <a:solidFill>
+                  <a:srgbClr val="666666"/>
+                </a:solidFill>
+                <a:latin typeface="Calibri"/>
+              </a:defRPr>
+            </a:pPr>
+            <a:r>
+              <a:t>learn_uart_spi_i2c / Module 4</a:t>
+            </a:r>
+          </a:p>
+        </p:txBody>
+      </p:sp>
+    </p:spTree>
+  </p:cSld>
+  <p:clrMapOvr>
+    <a:masterClrMapping/>
+  </p:clrMapOvr>
+</p:sld>
+</file>
+
+<file path=ppt/slides/slide18.xml><?xml version="1.0" encoding="utf-8"?>
+<p:sld xmlns:a="http://schemas.openxmlformats.org/drawingml/2006/main" xmlns:p="http://schemas.openxmlformats.org/presentationml/2006/main" xmlns:r="http://schemas.openxmlformats.org/officeDocument/2006/relationships">
+  <p:cSld>
+    <p:spTree>
+      <p:nvGrpSpPr>
+        <p:cNvPr id="1" name=""/>
+        <p:cNvGrpSpPr/>
+        <p:nvPr/>
+      </p:nvGrpSpPr>
+      <p:grpSpPr/>
+      <p:sp>
+        <p:nvSpPr>
+          <p:cNvPr id="2" name="TextBox 1"/>
+          <p:cNvSpPr txBox="1"/>
+          <p:nvPr/>
+        </p:nvSpPr>
+        <p:spPr>
+          <a:xfrm>
+            <a:off x="548640" y="411480"/>
+            <a:ext cx="11064240" cy="777240"/>
+          </a:xfrm>
+          <a:prstGeom prst="rect">
+            <a:avLst/>
+          </a:prstGeom>
+          <a:noFill/>
+        </p:spPr>
+        <p:txBody>
+          <a:bodyPr wrap="square">
+            <a:noAutofit/>
+          </a:bodyPr>
+          <a:lstStyle/>
+          <a:p>
+            <a:pPr>
+              <a:lnSpc>
+                <a:spcPts val="2200"/>
+              </a:lnSpc>
+              <a:defRPr sz="2800" b="1">
+                <a:solidFill>
+                  <a:srgbClr val="1A1A2E"/>
+                </a:solidFill>
+                <a:latin typeface="Calibri"/>
+              </a:defRPr>
+            </a:pPr>
+            <a:r>
+              <a:t>3. What to add next</a:t>
+            </a:r>
+          </a:p>
+        </p:txBody>
+      </p:sp>
+      <p:sp>
+        <p:nvSpPr>
+          <p:cNvPr id="3" name="TextBox 2"/>
+          <p:cNvSpPr txBox="1"/>
+          <p:nvPr/>
+        </p:nvSpPr>
+        <p:spPr>
+          <a:xfrm>
+            <a:off x="548640" y="1234440"/>
+            <a:ext cx="11064240" cy="4937760"/>
+          </a:xfrm>
+          <a:prstGeom prst="rect">
+            <a:avLst/>
+          </a:prstGeom>
+          <a:noFill/>
+        </p:spPr>
+        <p:txBody>
+          <a:bodyPr wrap="square">
+            <a:noAutofit/>
+          </a:bodyPr>
+          <a:lstStyle/>
           <a:p>
             <a:pPr>
               <a:lnSpc>
@@ -5363,7 +5961,83 @@
               </a:defRPr>
             </a:pPr>
             <a:r>
-              <a:t>• Next: SPI</a:t>
+              <a:t>• Random baud, framing-error injection, coverage on</a:t>
+            </a:r>
+          </a:p>
+          <a:p>
+            <a:pPr>
+              <a:lnSpc>
+                <a:spcPts val="2200"/>
+              </a:lnSpc>
+              <a:spcAft>
+                <a:spcPts val="1000"/>
+              </a:spcAft>
+              <a:defRPr sz="2000" b="0">
+                <a:solidFill>
+                  <a:srgbClr val="333333"/>
+                </a:solidFill>
+                <a:latin typeface="Calibri"/>
+              </a:defRPr>
+            </a:pPr>
+            <a:r>
+              <a:t>      `busy` / `data_valid`.</a:t>
+            </a:r>
+          </a:p>
+          <a:p>
+            <a:pPr>
+              <a:lnSpc>
+                <a:spcPts val="2200"/>
+              </a:lnSpc>
+              <a:spcAft>
+                <a:spcPts val="1000"/>
+              </a:spcAft>
+              <a:defRPr sz="2000" b="0">
+                <a:solidFill>
+                  <a:srgbClr val="333333"/>
+                </a:solidFill>
+                <a:latin typeface="Calibri"/>
+              </a:defRPr>
+            </a:pPr>
+            <a:r>
+              <a:t>• See [LEARNING_GUIDE_PROTOCOLS_AND_UVM.md §</a:t>
+            </a:r>
+          </a:p>
+          <a:p>
+            <a:pPr>
+              <a:lnSpc>
+                <a:spcPts val="2200"/>
+              </a:lnSpc>
+              <a:spcAft>
+                <a:spcPts val="1000"/>
+              </a:spcAft>
+              <a:defRPr sz="2000" b="0">
+                <a:solidFill>
+                  <a:srgbClr val="333333"/>
+                </a:solidFill>
+                <a:latin typeface="Calibri"/>
+              </a:defRPr>
+            </a:pPr>
+            <a:r>
+              <a:t>      6](LEARNING_GUIDE_PROTOCOLS_AND_UVM.md#6-uart-uvm-</a:t>
+            </a:r>
+          </a:p>
+          <a:p>
+            <a:pPr>
+              <a:lnSpc>
+                <a:spcPts val="2200"/>
+              </a:lnSpc>
+              <a:spcAft>
+                <a:spcPts val="1000"/>
+              </a:spcAft>
+              <a:defRPr sz="2000" b="0">
+                <a:solidFill>
+                  <a:srgbClr val="333333"/>
+                </a:solidFill>
+                <a:latin typeface="Calibri"/>
+              </a:defRPr>
+            </a:pPr>
+            <a:r>
+              <a:t>      mappin…</a:t>
             </a:r>
           </a:p>
         </p:txBody>
@@ -5371,6 +6045,102 @@
       <p:sp>
         <p:nvSpPr>
           <p:cNvPr id="4" name="TextBox 3"/>
+          <p:cNvSpPr txBox="1"/>
+          <p:nvPr/>
+        </p:nvSpPr>
+        <p:spPr>
+          <a:xfrm>
+            <a:off x="548640" y="6355080"/>
+            <a:ext cx="11064240" cy="320040"/>
+          </a:xfrm>
+          <a:prstGeom prst="rect">
+            <a:avLst/>
+          </a:prstGeom>
+          <a:noFill/>
+        </p:spPr>
+        <p:txBody>
+          <a:bodyPr wrap="square">
+            <a:noAutofit/>
+          </a:bodyPr>
+          <a:lstStyle/>
+          <a:p>
+            <a:pPr algn="r">
+              <a:lnSpc>
+                <a:spcPts val="2200"/>
+              </a:lnSpc>
+              <a:defRPr sz="1000" b="0">
+                <a:solidFill>
+                  <a:srgbClr val="666666"/>
+                </a:solidFill>
+                <a:latin typeface="Calibri"/>
+              </a:defRPr>
+            </a:pPr>
+            <a:r>
+              <a:t>learn_uart_spi_i2c / Module 4</a:t>
+            </a:r>
+          </a:p>
+        </p:txBody>
+      </p:sp>
+    </p:spTree>
+  </p:cSld>
+  <p:clrMapOvr>
+    <a:masterClrMapping/>
+  </p:clrMapOvr>
+</p:sld>
+</file>
+
+<file path=ppt/slides/slide19.xml><?xml version="1.0" encoding="utf-8"?>
+<p:sld xmlns:a="http://schemas.openxmlformats.org/drawingml/2006/main" xmlns:p="http://schemas.openxmlformats.org/presentationml/2006/main" xmlns:r="http://schemas.openxmlformats.org/officeDocument/2006/relationships">
+  <p:cSld>
+    <p:spTree>
+      <p:nvGrpSpPr>
+        <p:cNvPr id="1" name=""/>
+        <p:cNvGrpSpPr/>
+        <p:nvPr/>
+      </p:nvGrpSpPr>
+      <p:grpSpPr/>
+      <p:sp>
+        <p:nvSpPr>
+          <p:cNvPr id="2" name="TextBox 1"/>
+          <p:cNvSpPr txBox="1"/>
+          <p:nvPr/>
+        </p:nvSpPr>
+        <p:spPr>
+          <a:xfrm>
+            <a:off x="548640" y="2743200"/>
+            <a:ext cx="11064240" cy="1371600"/>
+          </a:xfrm>
+          <a:prstGeom prst="rect">
+            <a:avLst/>
+          </a:prstGeom>
+          <a:noFill/>
+        </p:spPr>
+        <p:txBody>
+          <a:bodyPr wrap="square">
+            <a:noAutofit/>
+          </a:bodyPr>
+          <a:lstStyle/>
+          <a:p>
+            <a:pPr algn="ctr">
+              <a:lnSpc>
+                <a:spcPts val="2200"/>
+              </a:lnSpc>
+              <a:defRPr sz="3600" b="1">
+                <a:solidFill>
+                  <a:srgbClr val="1A1A2E"/>
+                </a:solidFill>
+                <a:latin typeface="Calibri"/>
+              </a:defRPr>
+            </a:pPr>
+            <a:r>
+              <a:t>Syllabus topics</a:t>
+            </a:r>
+          </a:p>
+        </p:txBody>
+      </p:sp>
+      <p:sp>
+        <p:nvSpPr>
+          <p:cNvPr id="3" name="TextBox 2"/>
           <p:cNvSpPr txBox="1"/>
           <p:nvPr/>
         </p:nvSpPr>
@@ -5648,6 +6418,1698 @@
 </p:sld>
 </file>
 
+<file path=ppt/slides/slide20.xml><?xml version="1.0" encoding="utf-8"?>
+<p:sld xmlns:a="http://schemas.openxmlformats.org/drawingml/2006/main" xmlns:p="http://schemas.openxmlformats.org/presentationml/2006/main" xmlns:r="http://schemas.openxmlformats.org/officeDocument/2006/relationships">
+  <p:cSld>
+    <p:spTree>
+      <p:nvGrpSpPr>
+        <p:cNvPr id="1" name=""/>
+        <p:cNvGrpSpPr/>
+        <p:nvPr/>
+      </p:nvGrpSpPr>
+      <p:grpSpPr/>
+      <p:sp>
+        <p:nvSpPr>
+          <p:cNvPr id="2" name="TextBox 1"/>
+          <p:cNvSpPr txBox="1"/>
+          <p:nvPr/>
+        </p:nvSpPr>
+        <p:spPr>
+          <a:xfrm>
+            <a:off x="548640" y="411480"/>
+            <a:ext cx="11064240" cy="777240"/>
+          </a:xfrm>
+          <a:prstGeom prst="rect">
+            <a:avLst/>
+          </a:prstGeom>
+          <a:noFill/>
+        </p:spPr>
+        <p:txBody>
+          <a:bodyPr wrap="square">
+            <a:noAutofit/>
+          </a:bodyPr>
+          <a:lstStyle/>
+          <a:p>
+            <a:pPr>
+              <a:lnSpc>
+                <a:spcPts val="2200"/>
+              </a:lnSpc>
+              <a:defRPr sz="2800" b="1">
+                <a:solidFill>
+                  <a:srgbClr val="1A1A2E"/>
+                </a:solidFill>
+                <a:latin typeface="Calibri"/>
+              </a:defRPr>
+            </a:pPr>
+            <a:r>
+              <a:t>1. UART protocol recap (8N1)</a:t>
+            </a:r>
+          </a:p>
+        </p:txBody>
+      </p:sp>
+      <p:sp>
+        <p:nvSpPr>
+          <p:cNvPr id="3" name="TextBox 2"/>
+          <p:cNvSpPr txBox="1"/>
+          <p:nvPr/>
+        </p:nvSpPr>
+        <p:spPr>
+          <a:xfrm>
+            <a:off x="548640" y="1234440"/>
+            <a:ext cx="11064240" cy="4937760"/>
+          </a:xfrm>
+          <a:prstGeom prst="rect">
+            <a:avLst/>
+          </a:prstGeom>
+          <a:noFill/>
+        </p:spPr>
+        <p:txBody>
+          <a:bodyPr wrap="square">
+            <a:noAutofit/>
+          </a:bodyPr>
+          <a:lstStyle/>
+          <a:p>
+            <a:pPr>
+              <a:lnSpc>
+                <a:spcPts val="2200"/>
+              </a:lnSpc>
+              <a:spcAft>
+                <a:spcPts val="1000"/>
+              </a:spcAft>
+              <a:defRPr sz="2000" b="0">
+                <a:solidFill>
+                  <a:srgbClr val="333333"/>
+                </a:solidFill>
+                <a:latin typeface="Calibri"/>
+              </a:defRPr>
+            </a:pPr>
+            <a:r>
+              <a:t>• One byte = start (0) + 8 data (LSB first) + stop</a:t>
+            </a:r>
+          </a:p>
+          <a:p>
+            <a:pPr>
+              <a:lnSpc>
+                <a:spcPts val="2200"/>
+              </a:lnSpc>
+              <a:spcAft>
+                <a:spcPts val="1000"/>
+              </a:spcAft>
+              <a:defRPr sz="2000" b="0">
+                <a:solidFill>
+                  <a:srgbClr val="333333"/>
+                </a:solidFill>
+                <a:latin typeface="Calibri"/>
+              </a:defRPr>
+            </a:pPr>
+            <a:r>
+              <a:t>      (1); `baud_tick` times each bit.</a:t>
+            </a:r>
+          </a:p>
+          <a:p>
+            <a:pPr>
+              <a:lnSpc>
+                <a:spcPts val="2200"/>
+              </a:lnSpc>
+              <a:spcAft>
+                <a:spcPts val="1000"/>
+              </a:spcAft>
+              <a:defRPr sz="2000" b="0">
+                <a:solidFill>
+                  <a:srgbClr val="333333"/>
+                </a:solidFill>
+                <a:latin typeface="Calibri"/>
+              </a:defRPr>
+            </a:pPr>
+            <a:r>
+              <a:t>• Driver/monitor must follow the same rules as the</a:t>
+            </a:r>
+          </a:p>
+          <a:p>
+            <a:pPr>
+              <a:lnSpc>
+                <a:spcPts val="2200"/>
+              </a:lnSpc>
+              <a:spcAft>
+                <a:spcPts val="1000"/>
+              </a:spcAft>
+              <a:defRPr sz="2000" b="0">
+                <a:solidFill>
+                  <a:srgbClr val="333333"/>
+                </a:solidFill>
+                <a:latin typeface="Calibri"/>
+              </a:defRPr>
+            </a:pPr>
+            <a:r>
+              <a:t>      RTL.</a:t>
+            </a:r>
+          </a:p>
+        </p:txBody>
+      </p:sp>
+      <p:sp>
+        <p:nvSpPr>
+          <p:cNvPr id="4" name="TextBox 3"/>
+          <p:cNvSpPr txBox="1"/>
+          <p:nvPr/>
+        </p:nvSpPr>
+        <p:spPr>
+          <a:xfrm>
+            <a:off x="548640" y="6355080"/>
+            <a:ext cx="11064240" cy="320040"/>
+          </a:xfrm>
+          <a:prstGeom prst="rect">
+            <a:avLst/>
+          </a:prstGeom>
+          <a:noFill/>
+        </p:spPr>
+        <p:txBody>
+          <a:bodyPr wrap="square">
+            <a:noAutofit/>
+          </a:bodyPr>
+          <a:lstStyle/>
+          <a:p>
+            <a:pPr algn="r">
+              <a:lnSpc>
+                <a:spcPts val="2200"/>
+              </a:lnSpc>
+              <a:defRPr sz="1000" b="0">
+                <a:solidFill>
+                  <a:srgbClr val="666666"/>
+                </a:solidFill>
+                <a:latin typeface="Calibri"/>
+              </a:defRPr>
+            </a:pPr>
+            <a:r>
+              <a:t>learn_uart_spi_i2c / Module 4</a:t>
+            </a:r>
+          </a:p>
+        </p:txBody>
+      </p:sp>
+    </p:spTree>
+  </p:cSld>
+  <p:clrMapOvr>
+    <a:masterClrMapping/>
+  </p:clrMapOvr>
+</p:sld>
+</file>
+
+<file path=ppt/slides/slide21.xml><?xml version="1.0" encoding="utf-8"?>
+<p:sld xmlns:a="http://schemas.openxmlformats.org/drawingml/2006/main" xmlns:p="http://schemas.openxmlformats.org/presentationml/2006/main" xmlns:r="http://schemas.openxmlformats.org/officeDocument/2006/relationships">
+  <p:cSld>
+    <p:spTree>
+      <p:nvGrpSpPr>
+        <p:cNvPr id="1" name=""/>
+        <p:cNvGrpSpPr/>
+        <p:nvPr/>
+      </p:nvGrpSpPr>
+      <p:grpSpPr/>
+      <p:sp>
+        <p:nvSpPr>
+          <p:cNvPr id="2" name="TextBox 1"/>
+          <p:cNvSpPr txBox="1"/>
+          <p:nvPr/>
+        </p:nvSpPr>
+        <p:spPr>
+          <a:xfrm>
+            <a:off x="548640" y="411480"/>
+            <a:ext cx="11064240" cy="777240"/>
+          </a:xfrm>
+          <a:prstGeom prst="rect">
+            <a:avLst/>
+          </a:prstGeom>
+          <a:noFill/>
+        </p:spPr>
+        <p:txBody>
+          <a:bodyPr wrap="square">
+            <a:noAutofit/>
+          </a:bodyPr>
+          <a:lstStyle/>
+          <a:p>
+            <a:pPr>
+              <a:lnSpc>
+                <a:spcPts val="2200"/>
+              </a:lnSpc>
+              <a:defRPr sz="2800" b="1">
+                <a:solidFill>
+                  <a:srgbClr val="1A1A2E"/>
+                </a:solidFill>
+                <a:latin typeface="Calibri"/>
+              </a:defRPr>
+            </a:pPr>
+            <a:r>
+              <a:t>2. Toolchain</a:t>
+            </a:r>
+          </a:p>
+        </p:txBody>
+      </p:sp>
+      <p:sp>
+        <p:nvSpPr>
+          <p:cNvPr id="3" name="TextBox 2"/>
+          <p:cNvSpPr txBox="1"/>
+          <p:nvPr/>
+        </p:nvSpPr>
+        <p:spPr>
+          <a:xfrm>
+            <a:off x="548640" y="1234440"/>
+            <a:ext cx="11064240" cy="4937760"/>
+          </a:xfrm>
+          <a:prstGeom prst="rect">
+            <a:avLst/>
+          </a:prstGeom>
+          <a:noFill/>
+        </p:spPr>
+        <p:txBody>
+          <a:bodyPr wrap="square">
+            <a:noAutofit/>
+          </a:bodyPr>
+          <a:lstStyle/>
+          <a:p>
+            <a:pPr>
+              <a:lnSpc>
+                <a:spcPts val="2200"/>
+              </a:lnSpc>
+              <a:spcAft>
+                <a:spcPts val="1000"/>
+              </a:spcAft>
+              <a:defRPr sz="2000" b="0">
+                <a:solidFill>
+                  <a:srgbClr val="333333"/>
+                </a:solidFill>
+                <a:latin typeface="Calibri"/>
+              </a:defRPr>
+            </a:pPr>
+            <a:r>
+              <a:t>• Verilator `-sv`, `--timing`, UVM includes; `make</a:t>
+            </a:r>
+          </a:p>
+          <a:p>
+            <a:pPr>
+              <a:lnSpc>
+                <a:spcPts val="2200"/>
+              </a:lnSpc>
+              <a:spcAft>
+                <a:spcPts val="1000"/>
+              </a:spcAft>
+              <a:defRPr sz="2000" b="0">
+                <a:solidFill>
+                  <a:srgbClr val="333333"/>
+                </a:solidFill>
+                <a:latin typeface="Calibri"/>
+              </a:defRPr>
+            </a:pPr>
+            <a:r>
+              <a:t>      SIM=verilator TEST=test_uart_uvm`; `+UVM_TESTNAME=…</a:t>
+            </a:r>
+          </a:p>
+        </p:txBody>
+      </p:sp>
+      <p:sp>
+        <p:nvSpPr>
+          <p:cNvPr id="4" name="TextBox 3"/>
+          <p:cNvSpPr txBox="1"/>
+          <p:nvPr/>
+        </p:nvSpPr>
+        <p:spPr>
+          <a:xfrm>
+            <a:off x="548640" y="6355080"/>
+            <a:ext cx="11064240" cy="320040"/>
+          </a:xfrm>
+          <a:prstGeom prst="rect">
+            <a:avLst/>
+          </a:prstGeom>
+          <a:noFill/>
+        </p:spPr>
+        <p:txBody>
+          <a:bodyPr wrap="square">
+            <a:noAutofit/>
+          </a:bodyPr>
+          <a:lstStyle/>
+          <a:p>
+            <a:pPr algn="r">
+              <a:lnSpc>
+                <a:spcPts val="2200"/>
+              </a:lnSpc>
+              <a:defRPr sz="1000" b="0">
+                <a:solidFill>
+                  <a:srgbClr val="666666"/>
+                </a:solidFill>
+                <a:latin typeface="Calibri"/>
+              </a:defRPr>
+            </a:pPr>
+            <a:r>
+              <a:t>learn_uart_spi_i2c / Module 4</a:t>
+            </a:r>
+          </a:p>
+        </p:txBody>
+      </p:sp>
+    </p:spTree>
+  </p:cSld>
+  <p:clrMapOvr>
+    <a:masterClrMapping/>
+  </p:clrMapOvr>
+</p:sld>
+</file>
+
+<file path=ppt/slides/slide22.xml><?xml version="1.0" encoding="utf-8"?>
+<p:sld xmlns:a="http://schemas.openxmlformats.org/drawingml/2006/main" xmlns:p="http://schemas.openxmlformats.org/presentationml/2006/main" xmlns:r="http://schemas.openxmlformats.org/officeDocument/2006/relationships">
+  <p:cSld>
+    <p:spTree>
+      <p:nvGrpSpPr>
+        <p:cNvPr id="1" name=""/>
+        <p:cNvGrpSpPr/>
+        <p:nvPr/>
+      </p:nvGrpSpPr>
+      <p:grpSpPr/>
+      <p:sp>
+        <p:nvSpPr>
+          <p:cNvPr id="2" name="TextBox 1"/>
+          <p:cNvSpPr txBox="1"/>
+          <p:nvPr/>
+        </p:nvSpPr>
+        <p:spPr>
+          <a:xfrm>
+            <a:off x="548640" y="2743200"/>
+            <a:ext cx="11064240" cy="1371600"/>
+          </a:xfrm>
+          <a:prstGeom prst="rect">
+            <a:avLst/>
+          </a:prstGeom>
+          <a:noFill/>
+        </p:spPr>
+        <p:txBody>
+          <a:bodyPr wrap="square">
+            <a:noAutofit/>
+          </a:bodyPr>
+          <a:lstStyle/>
+          <a:p>
+            <a:pPr algn="ctr">
+              <a:lnSpc>
+                <a:spcPts val="2200"/>
+              </a:lnSpc>
+              <a:defRPr sz="3600" b="1">
+                <a:solidFill>
+                  <a:srgbClr val="1A1A2E"/>
+                </a:solidFill>
+                <a:latin typeface="Calibri"/>
+              </a:defRPr>
+            </a:pPr>
+            <a:r>
+              <a:t>Hands-on examples</a:t>
+            </a:r>
+          </a:p>
+        </p:txBody>
+      </p:sp>
+      <p:sp>
+        <p:nvSpPr>
+          <p:cNvPr id="3" name="TextBox 2"/>
+          <p:cNvSpPr txBox="1"/>
+          <p:nvPr/>
+        </p:nvSpPr>
+        <p:spPr>
+          <a:xfrm>
+            <a:off x="548640" y="6355080"/>
+            <a:ext cx="11064240" cy="320040"/>
+          </a:xfrm>
+          <a:prstGeom prst="rect">
+            <a:avLst/>
+          </a:prstGeom>
+          <a:noFill/>
+        </p:spPr>
+        <p:txBody>
+          <a:bodyPr wrap="square">
+            <a:noAutofit/>
+          </a:bodyPr>
+          <a:lstStyle/>
+          <a:p>
+            <a:pPr algn="r">
+              <a:lnSpc>
+                <a:spcPts val="2200"/>
+              </a:lnSpc>
+              <a:defRPr sz="1000" b="0">
+                <a:solidFill>
+                  <a:srgbClr val="666666"/>
+                </a:solidFill>
+                <a:latin typeface="Calibri"/>
+              </a:defRPr>
+            </a:pPr>
+            <a:r>
+              <a:t>learn_uart_spi_i2c / Module 4</a:t>
+            </a:r>
+          </a:p>
+        </p:txBody>
+      </p:sp>
+    </p:spTree>
+  </p:cSld>
+  <p:clrMapOvr>
+    <a:masterClrMapping/>
+  </p:clrMapOvr>
+</p:sld>
+</file>
+
+<file path=ppt/slides/slide23.xml><?xml version="1.0" encoding="utf-8"?>
+<p:sld xmlns:a="http://schemas.openxmlformats.org/drawingml/2006/main" xmlns:p="http://schemas.openxmlformats.org/presentationml/2006/main" xmlns:r="http://schemas.openxmlformats.org/officeDocument/2006/relationships">
+  <p:cSld>
+    <p:spTree>
+      <p:nvGrpSpPr>
+        <p:cNvPr id="1" name=""/>
+        <p:cNvGrpSpPr/>
+        <p:nvPr/>
+      </p:nvGrpSpPr>
+      <p:grpSpPr/>
+      <p:sp>
+        <p:nvSpPr>
+          <p:cNvPr id="2" name="TextBox 1"/>
+          <p:cNvSpPr txBox="1"/>
+          <p:nvPr/>
+        </p:nvSpPr>
+        <p:spPr>
+          <a:xfrm>
+            <a:off x="548640" y="411480"/>
+            <a:ext cx="11064240" cy="777240"/>
+          </a:xfrm>
+          <a:prstGeom prst="rect">
+            <a:avLst/>
+          </a:prstGeom>
+          <a:noFill/>
+        </p:spPr>
+        <p:txBody>
+          <a:bodyPr wrap="square">
+            <a:noAutofit/>
+          </a:bodyPr>
+          <a:lstStyle/>
+          <a:p>
+            <a:pPr>
+              <a:lnSpc>
+                <a:spcPts val="2200"/>
+              </a:lnSpc>
+              <a:defRPr sz="2800" b="1">
+                <a:solidFill>
+                  <a:srgbClr val="1A1A2E"/>
+                </a:solidFill>
+                <a:latin typeface="Calibri"/>
+              </a:defRPr>
+            </a:pPr>
+            <a:r>
+              <a:t>Module 4 self-check</a:t>
+            </a:r>
+          </a:p>
+        </p:txBody>
+      </p:sp>
+      <p:sp>
+        <p:nvSpPr>
+          <p:cNvPr id="3" name="TextBox 2"/>
+          <p:cNvSpPr txBox="1"/>
+          <p:nvPr/>
+        </p:nvSpPr>
+        <p:spPr>
+          <a:xfrm>
+            <a:off x="548640" y="1051560"/>
+            <a:ext cx="11064240" cy="914400"/>
+          </a:xfrm>
+          <a:prstGeom prst="rect">
+            <a:avLst/>
+          </a:prstGeom>
+          <a:solidFill>
+            <a:srgbClr val="F4F4F4"/>
+          </a:solidFill>
+        </p:spPr>
+        <p:txBody>
+          <a:bodyPr wrap="square">
+            <a:noAutofit/>
+          </a:bodyPr>
+          <a:lstStyle/>
+          <a:p>
+            <a:pPr>
+              <a:lnSpc>
+                <a:spcPts val="2200"/>
+              </a:lnSpc>
+              <a:spcAft>
+                <a:spcPts val="200"/>
+              </a:spcAft>
+              <a:defRPr sz="2000" b="0">
+                <a:solidFill>
+                  <a:srgbClr val="333333"/>
+                </a:solidFill>
+                <a:latin typeface="Consolas"/>
+              </a:defRPr>
+            </a:pPr>
+            <a:r>
+              <a:t>$ ./scripts/module4.sh --help</a:t>
+            </a:r>
+          </a:p>
+        </p:txBody>
+      </p:sp>
+      <p:pic>
+        <p:nvPicPr>
+          <p:cNvPr id="4" name="Picture 3" descr="module4_check.png"/>
+          <p:cNvPicPr>
+            <a:picLocks noChangeAspect="1"/>
+          </p:cNvPicPr>
+          <p:nvPr/>
+        </p:nvPicPr>
+        <p:blipFill>
+          <a:blip r:embed="rId2"/>
+          <a:stretch>
+            <a:fillRect/>
+          </a:stretch>
+        </p:blipFill>
+        <p:spPr>
+          <a:xfrm>
+            <a:off x="548640" y="1965960"/>
+            <a:ext cx="7071358" cy="3977639"/>
+          </a:xfrm>
+          <a:prstGeom prst="rect">
+            <a:avLst/>
+          </a:prstGeom>
+        </p:spPr>
+      </p:pic>
+      <p:sp>
+        <p:nvSpPr>
+          <p:cNvPr id="5" name="TextBox 4"/>
+          <p:cNvSpPr txBox="1"/>
+          <p:nvPr/>
+        </p:nvSpPr>
+        <p:spPr>
+          <a:xfrm>
+            <a:off x="548640" y="6355080"/>
+            <a:ext cx="11064240" cy="320040"/>
+          </a:xfrm>
+          <a:prstGeom prst="rect">
+            <a:avLst/>
+          </a:prstGeom>
+          <a:noFill/>
+        </p:spPr>
+        <p:txBody>
+          <a:bodyPr wrap="square">
+            <a:noAutofit/>
+          </a:bodyPr>
+          <a:lstStyle/>
+          <a:p>
+            <a:pPr algn="r">
+              <a:lnSpc>
+                <a:spcPts val="2200"/>
+              </a:lnSpc>
+              <a:defRPr sz="1000" b="0">
+                <a:solidFill>
+                  <a:srgbClr val="666666"/>
+                </a:solidFill>
+                <a:latin typeface="Calibri"/>
+              </a:defRPr>
+            </a:pPr>
+            <a:r>
+              <a:t>learn_uart_spi_i2c / Module 4</a:t>
+            </a:r>
+          </a:p>
+        </p:txBody>
+      </p:sp>
+    </p:spTree>
+  </p:cSld>
+  <p:clrMapOvr>
+    <a:masterClrMapping/>
+  </p:clrMapOvr>
+</p:sld>
+</file>
+
+<file path=ppt/slides/slide24.xml><?xml version="1.0" encoding="utf-8"?>
+<p:sld xmlns:a="http://schemas.openxmlformats.org/drawingml/2006/main" xmlns:p="http://schemas.openxmlformats.org/presentationml/2006/main" xmlns:r="http://schemas.openxmlformats.org/officeDocument/2006/relationships">
+  <p:cSld>
+    <p:spTree>
+      <p:nvGrpSpPr>
+        <p:cNvPr id="1" name=""/>
+        <p:cNvGrpSpPr/>
+        <p:nvPr/>
+      </p:nvGrpSpPr>
+      <p:grpSpPr/>
+      <p:sp>
+        <p:nvSpPr>
+          <p:cNvPr id="2" name="TextBox 1"/>
+          <p:cNvSpPr txBox="1"/>
+          <p:nvPr/>
+        </p:nvSpPr>
+        <p:spPr>
+          <a:xfrm>
+            <a:off x="548640" y="411480"/>
+            <a:ext cx="11064240" cy="777240"/>
+          </a:xfrm>
+          <a:prstGeom prst="rect">
+            <a:avLst/>
+          </a:prstGeom>
+          <a:noFill/>
+        </p:spPr>
+        <p:txBody>
+          <a:bodyPr wrap="square">
+            <a:noAutofit/>
+          </a:bodyPr>
+          <a:lstStyle/>
+          <a:p>
+            <a:pPr>
+              <a:lnSpc>
+                <a:spcPts val="2200"/>
+              </a:lnSpc>
+              <a:defRPr sz="2800" b="1">
+                <a:solidFill>
+                  <a:srgbClr val="1A1A2E"/>
+                </a:solidFill>
+                <a:latin typeface="Calibri"/>
+              </a:defRPr>
+            </a:pPr>
+            <a:r>
+              <a:t>Exercise scaffold</a:t>
+            </a:r>
+          </a:p>
+        </p:txBody>
+      </p:sp>
+      <p:sp>
+        <p:nvSpPr>
+          <p:cNvPr id="3" name="TextBox 2"/>
+          <p:cNvSpPr txBox="1"/>
+          <p:nvPr/>
+        </p:nvSpPr>
+        <p:spPr>
+          <a:xfrm>
+            <a:off x="548640" y="1143000"/>
+            <a:ext cx="11064240" cy="5029200"/>
+          </a:xfrm>
+          <a:prstGeom prst="rect">
+            <a:avLst/>
+          </a:prstGeom>
+          <a:solidFill>
+            <a:srgbClr val="F4F4F4"/>
+          </a:solidFill>
+        </p:spPr>
+        <p:txBody>
+          <a:bodyPr wrap="square">
+            <a:noAutofit/>
+          </a:bodyPr>
+          <a:lstStyle/>
+          <a:p>
+            <a:pPr>
+              <a:lnSpc>
+                <a:spcPts val="2200"/>
+              </a:lnSpc>
+              <a:spcAft>
+                <a:spcPts val="400"/>
+              </a:spcAft>
+              <a:defRPr sz="2000" b="0">
+                <a:solidFill>
+                  <a:srgbClr val="333333"/>
+                </a:solidFill>
+                <a:latin typeface="Consolas"/>
+              </a:defRPr>
+            </a:pPr>
+            <a:r>
+              <a:t>./scripts/module4.sh --scaffold</a:t>
+            </a:r>
+          </a:p>
+        </p:txBody>
+      </p:sp>
+      <p:sp>
+        <p:nvSpPr>
+          <p:cNvPr id="4" name="TextBox 3"/>
+          <p:cNvSpPr txBox="1"/>
+          <p:nvPr/>
+        </p:nvSpPr>
+        <p:spPr>
+          <a:xfrm>
+            <a:off x="548640" y="6355080"/>
+            <a:ext cx="11064240" cy="320040"/>
+          </a:xfrm>
+          <a:prstGeom prst="rect">
+            <a:avLst/>
+          </a:prstGeom>
+          <a:noFill/>
+        </p:spPr>
+        <p:txBody>
+          <a:bodyPr wrap="square">
+            <a:noAutofit/>
+          </a:bodyPr>
+          <a:lstStyle/>
+          <a:p>
+            <a:pPr algn="r">
+              <a:lnSpc>
+                <a:spcPts val="2200"/>
+              </a:lnSpc>
+              <a:defRPr sz="1000" b="0">
+                <a:solidFill>
+                  <a:srgbClr val="666666"/>
+                </a:solidFill>
+                <a:latin typeface="Calibri"/>
+              </a:defRPr>
+            </a:pPr>
+            <a:r>
+              <a:t>learn_uart_spi_i2c / Module 4</a:t>
+            </a:r>
+          </a:p>
+        </p:txBody>
+      </p:sp>
+    </p:spTree>
+  </p:cSld>
+  <p:clrMapOvr>
+    <a:masterClrMapping/>
+  </p:clrMapOvr>
+</p:sld>
+</file>
+
+<file path=ppt/slides/slide25.xml><?xml version="1.0" encoding="utf-8"?>
+<p:sld xmlns:a="http://schemas.openxmlformats.org/drawingml/2006/main" xmlns:p="http://schemas.openxmlformats.org/presentationml/2006/main" xmlns:r="http://schemas.openxmlformats.org/officeDocument/2006/relationships">
+  <p:cSld>
+    <p:spTree>
+      <p:nvGrpSpPr>
+        <p:cNvPr id="1" name=""/>
+        <p:cNvGrpSpPr/>
+        <p:nvPr/>
+      </p:nvGrpSpPr>
+      <p:grpSpPr/>
+      <p:sp>
+        <p:nvSpPr>
+          <p:cNvPr id="2" name="TextBox 1"/>
+          <p:cNvSpPr txBox="1"/>
+          <p:nvPr/>
+        </p:nvSpPr>
+        <p:spPr>
+          <a:xfrm>
+            <a:off x="548640" y="411480"/>
+            <a:ext cx="11064240" cy="777240"/>
+          </a:xfrm>
+          <a:prstGeom prst="rect">
+            <a:avLst/>
+          </a:prstGeom>
+          <a:noFill/>
+        </p:spPr>
+        <p:txBody>
+          <a:bodyPr wrap="square">
+            <a:noAutofit/>
+          </a:bodyPr>
+          <a:lstStyle/>
+          <a:p>
+            <a:pPr>
+              <a:lnSpc>
+                <a:spcPts val="2200"/>
+              </a:lnSpc>
+              <a:defRPr sz="2800" b="1">
+                <a:solidFill>
+                  <a:srgbClr val="1A1A2E"/>
+                </a:solidFill>
+                <a:latin typeface="Calibri"/>
+              </a:defRPr>
+            </a:pPr>
+            <a:r>
+              <a:t>Example 1: UART UVM</a:t>
+            </a:r>
+          </a:p>
+        </p:txBody>
+      </p:sp>
+      <p:sp>
+        <p:nvSpPr>
+          <p:cNvPr id="3" name="TextBox 2"/>
+          <p:cNvSpPr txBox="1"/>
+          <p:nvPr/>
+        </p:nvSpPr>
+        <p:spPr>
+          <a:xfrm>
+            <a:off x="548640" y="1234440"/>
+            <a:ext cx="11064240" cy="4937760"/>
+          </a:xfrm>
+          <a:prstGeom prst="rect">
+            <a:avLst/>
+          </a:prstGeom>
+          <a:noFill/>
+        </p:spPr>
+        <p:txBody>
+          <a:bodyPr wrap="square">
+            <a:noAutofit/>
+          </a:bodyPr>
+          <a:lstStyle/>
+          <a:p>
+            <a:pPr>
+              <a:lnSpc>
+                <a:spcPts val="2200"/>
+              </a:lnSpc>
+              <a:spcAft>
+                <a:spcPts val="1000"/>
+              </a:spcAft>
+              <a:defRPr sz="2000" b="0">
+                <a:solidFill>
+                  <a:srgbClr val="333333"/>
+                </a:solidFill>
+                <a:latin typeface="Calibri"/>
+              </a:defRPr>
+            </a:pPr>
+            <a:r>
+              <a:t>• UVM phases and reporting (DRIVER, MONITOR,</a:t>
+            </a:r>
+          </a:p>
+          <a:p>
+            <a:pPr>
+              <a:lnSpc>
+                <a:spcPts val="2200"/>
+              </a:lnSpc>
+              <a:spcAft>
+                <a:spcPts val="1000"/>
+              </a:spcAft>
+              <a:defRPr sz="2000" b="0">
+                <a:solidFill>
+                  <a:srgbClr val="333333"/>
+                </a:solidFill>
+                <a:latin typeface="Calibri"/>
+              </a:defRPr>
+            </a:pPr>
+            <a:r>
+              <a:t>      SCOREBOARD).</a:t>
+            </a:r>
+          </a:p>
+          <a:p>
+            <a:pPr>
+              <a:lnSpc>
+                <a:spcPts val="2200"/>
+              </a:lnSpc>
+              <a:spcAft>
+                <a:spcPts val="1000"/>
+              </a:spcAft>
+              <a:defRPr sz="2000" b="0">
+                <a:solidFill>
+                  <a:srgbClr val="333333"/>
+                </a:solidFill>
+                <a:latin typeface="Calibri"/>
+              </a:defRPr>
+            </a:pPr>
+            <a:r>
+              <a:t>• TX and RX scoreboard checks (TX: monitor observes</a:t>
+            </a:r>
+          </a:p>
+          <a:p>
+            <a:pPr>
+              <a:lnSpc>
+                <a:spcPts val="2200"/>
+              </a:lnSpc>
+              <a:spcAft>
+                <a:spcPts val="1000"/>
+              </a:spcAft>
+              <a:defRPr sz="2000" b="0">
+                <a:solidFill>
+                  <a:srgbClr val="333333"/>
+                </a:solidFill>
+                <a:latin typeface="Calibri"/>
+              </a:defRPr>
+            </a:pPr>
+            <a:r>
+              <a:t>      serial line; RX: loopback byte checked via scoreb…</a:t>
+            </a:r>
+          </a:p>
+          <a:p>
+            <a:pPr>
+              <a:lnSpc>
+                <a:spcPts val="2200"/>
+              </a:lnSpc>
+              <a:spcAft>
+                <a:spcPts val="1000"/>
+              </a:spcAft>
+              <a:defRPr sz="2000" b="0">
+                <a:solidFill>
+                  <a:srgbClr val="333333"/>
+                </a:solidFill>
+                <a:latin typeface="Calibri"/>
+              </a:defRPr>
+            </a:pPr>
+            <a:r>
+              <a:t>• Final scoreboard summary (TX/RX matches and</a:t>
+            </a:r>
+          </a:p>
+          <a:p>
+            <a:pPr>
+              <a:lnSpc>
+                <a:spcPts val="2200"/>
+              </a:lnSpc>
+              <a:spcAft>
+                <a:spcPts val="1000"/>
+              </a:spcAft>
+              <a:defRPr sz="2000" b="0">
+                <a:solidFill>
+                  <a:srgbClr val="333333"/>
+                </a:solidFill>
+                <a:latin typeface="Calibri"/>
+              </a:defRPr>
+            </a:pPr>
+            <a:r>
+              <a:t>      mismatches).</a:t>
+            </a:r>
+          </a:p>
+        </p:txBody>
+      </p:sp>
+      <p:sp>
+        <p:nvSpPr>
+          <p:cNvPr id="4" name="TextBox 3"/>
+          <p:cNvSpPr txBox="1"/>
+          <p:nvPr/>
+        </p:nvSpPr>
+        <p:spPr>
+          <a:xfrm>
+            <a:off x="548640" y="6355080"/>
+            <a:ext cx="11064240" cy="320040"/>
+          </a:xfrm>
+          <a:prstGeom prst="rect">
+            <a:avLst/>
+          </a:prstGeom>
+          <a:noFill/>
+        </p:spPr>
+        <p:txBody>
+          <a:bodyPr wrap="square">
+            <a:noAutofit/>
+          </a:bodyPr>
+          <a:lstStyle/>
+          <a:p>
+            <a:pPr algn="r">
+              <a:lnSpc>
+                <a:spcPts val="2200"/>
+              </a:lnSpc>
+              <a:defRPr sz="1000" b="0">
+                <a:solidFill>
+                  <a:srgbClr val="666666"/>
+                </a:solidFill>
+                <a:latin typeface="Calibri"/>
+              </a:defRPr>
+            </a:pPr>
+            <a:r>
+              <a:t>learn_uart_spi_i2c / Module 4</a:t>
+            </a:r>
+          </a:p>
+        </p:txBody>
+      </p:sp>
+    </p:spTree>
+  </p:cSld>
+  <p:clrMapOvr>
+    <a:masterClrMapping/>
+  </p:clrMapOvr>
+</p:sld>
+</file>
+
+<file path=ppt/slides/slide26.xml><?xml version="1.0" encoding="utf-8"?>
+<p:sld xmlns:a="http://schemas.openxmlformats.org/drawingml/2006/main" xmlns:p="http://schemas.openxmlformats.org/presentationml/2006/main" xmlns:r="http://schemas.openxmlformats.org/officeDocument/2006/relationships">
+  <p:cSld>
+    <p:spTree>
+      <p:nvGrpSpPr>
+        <p:cNvPr id="1" name=""/>
+        <p:cNvGrpSpPr/>
+        <p:nvPr/>
+      </p:nvGrpSpPr>
+      <p:grpSpPr/>
+      <p:sp>
+        <p:nvSpPr>
+          <p:cNvPr id="2" name="TextBox 1"/>
+          <p:cNvSpPr txBox="1"/>
+          <p:nvPr/>
+        </p:nvSpPr>
+        <p:spPr>
+          <a:xfrm>
+            <a:off x="548640" y="411480"/>
+            <a:ext cx="11064240" cy="777240"/>
+          </a:xfrm>
+          <a:prstGeom prst="rect">
+            <a:avLst/>
+          </a:prstGeom>
+          <a:noFill/>
+        </p:spPr>
+        <p:txBody>
+          <a:bodyPr wrap="square">
+            <a:noAutofit/>
+          </a:bodyPr>
+          <a:lstStyle/>
+          <a:p>
+            <a:pPr>
+              <a:lnSpc>
+                <a:spcPts val="2200"/>
+              </a:lnSpc>
+              <a:defRPr sz="2800" b="1">
+                <a:solidFill>
+                  <a:srgbClr val="1A1A2E"/>
+                </a:solidFill>
+                <a:latin typeface="Calibri"/>
+              </a:defRPr>
+            </a:pPr>
+            <a:r>
+              <a:t>Demo: UART UVM</a:t>
+            </a:r>
+          </a:p>
+        </p:txBody>
+      </p:sp>
+      <p:sp>
+        <p:nvSpPr>
+          <p:cNvPr id="3" name="TextBox 2"/>
+          <p:cNvSpPr txBox="1"/>
+          <p:nvPr/>
+        </p:nvSpPr>
+        <p:spPr>
+          <a:xfrm>
+            <a:off x="548640" y="1051560"/>
+            <a:ext cx="11064240" cy="914400"/>
+          </a:xfrm>
+          <a:prstGeom prst="rect">
+            <a:avLst/>
+          </a:prstGeom>
+          <a:solidFill>
+            <a:srgbClr val="F4F4F4"/>
+          </a:solidFill>
+        </p:spPr>
+        <p:txBody>
+          <a:bodyPr wrap="square">
+            <a:noAutofit/>
+          </a:bodyPr>
+          <a:lstStyle/>
+          <a:p>
+            <a:pPr>
+              <a:lnSpc>
+                <a:spcPts val="2200"/>
+              </a:lnSpc>
+              <a:spcAft>
+                <a:spcPts val="200"/>
+              </a:spcAft>
+              <a:defRPr sz="2000" b="0">
+                <a:solidFill>
+                  <a:srgbClr val="333333"/>
+                </a:solidFill>
+                <a:latin typeface="Consolas"/>
+              </a:defRPr>
+            </a:pPr>
+            <a:r>
+              <a:t>$ ./scripts/module4.sh --run</a:t>
+            </a:r>
+          </a:p>
+        </p:txBody>
+      </p:sp>
+      <p:pic>
+        <p:nvPicPr>
+          <p:cNvPr id="4" name="Picture 3" descr="uart_uvm.png"/>
+          <p:cNvPicPr>
+            <a:picLocks noChangeAspect="1"/>
+          </p:cNvPicPr>
+          <p:nvPr/>
+        </p:nvPicPr>
+        <p:blipFill>
+          <a:blip r:embed="rId2"/>
+          <a:stretch>
+            <a:fillRect/>
+          </a:stretch>
+        </p:blipFill>
+        <p:spPr>
+          <a:xfrm>
+            <a:off x="548640" y="1965960"/>
+            <a:ext cx="7071358" cy="3977639"/>
+          </a:xfrm>
+          <a:prstGeom prst="rect">
+            <a:avLst/>
+          </a:prstGeom>
+        </p:spPr>
+      </p:pic>
+      <p:sp>
+        <p:nvSpPr>
+          <p:cNvPr id="5" name="TextBox 4"/>
+          <p:cNvSpPr txBox="1"/>
+          <p:nvPr/>
+        </p:nvSpPr>
+        <p:spPr>
+          <a:xfrm>
+            <a:off x="548640" y="6355080"/>
+            <a:ext cx="11064240" cy="320040"/>
+          </a:xfrm>
+          <a:prstGeom prst="rect">
+            <a:avLst/>
+          </a:prstGeom>
+          <a:noFill/>
+        </p:spPr>
+        <p:txBody>
+          <a:bodyPr wrap="square">
+            <a:noAutofit/>
+          </a:bodyPr>
+          <a:lstStyle/>
+          <a:p>
+            <a:pPr algn="r">
+              <a:lnSpc>
+                <a:spcPts val="2200"/>
+              </a:lnSpc>
+              <a:defRPr sz="1000" b="0">
+                <a:solidFill>
+                  <a:srgbClr val="666666"/>
+                </a:solidFill>
+                <a:latin typeface="Calibri"/>
+              </a:defRPr>
+            </a:pPr>
+            <a:r>
+              <a:t>learn_uart_spi_i2c / Module 4</a:t>
+            </a:r>
+          </a:p>
+        </p:txBody>
+      </p:sp>
+    </p:spTree>
+  </p:cSld>
+  <p:clrMapOvr>
+    <a:masterClrMapping/>
+  </p:clrMapOvr>
+</p:sld>
+</file>
+
+<file path=ppt/slides/slide27.xml><?xml version="1.0" encoding="utf-8"?>
+<p:sld xmlns:a="http://schemas.openxmlformats.org/drawingml/2006/main" xmlns:p="http://schemas.openxmlformats.org/presentationml/2006/main" xmlns:r="http://schemas.openxmlformats.org/officeDocument/2006/relationships">
+  <p:cSld>
+    <p:spTree>
+      <p:nvGrpSpPr>
+        <p:cNvPr id="1" name=""/>
+        <p:cNvGrpSpPr/>
+        <p:nvPr/>
+      </p:nvGrpSpPr>
+      <p:grpSpPr/>
+      <p:sp>
+        <p:nvSpPr>
+          <p:cNvPr id="2" name="TextBox 1"/>
+          <p:cNvSpPr txBox="1"/>
+          <p:nvPr/>
+        </p:nvSpPr>
+        <p:spPr>
+          <a:xfrm>
+            <a:off x="548640" y="2743200"/>
+            <a:ext cx="11064240" cy="1371600"/>
+          </a:xfrm>
+          <a:prstGeom prst="rect">
+            <a:avLst/>
+          </a:prstGeom>
+          <a:noFill/>
+        </p:spPr>
+        <p:txBody>
+          <a:bodyPr wrap="square">
+            <a:noAutofit/>
+          </a:bodyPr>
+          <a:lstStyle/>
+          <a:p>
+            <a:pPr algn="ctr">
+              <a:lnSpc>
+                <a:spcPts val="2200"/>
+              </a:lnSpc>
+              <a:defRPr sz="3600" b="1">
+                <a:solidFill>
+                  <a:srgbClr val="1A1A2E"/>
+                </a:solidFill>
+                <a:latin typeface="Calibri"/>
+              </a:defRPr>
+            </a:pPr>
+            <a:r>
+              <a:t>Practice &amp; assessment</a:t>
+            </a:r>
+          </a:p>
+        </p:txBody>
+      </p:sp>
+      <p:sp>
+        <p:nvSpPr>
+          <p:cNvPr id="3" name="TextBox 2"/>
+          <p:cNvSpPr txBox="1"/>
+          <p:nvPr/>
+        </p:nvSpPr>
+        <p:spPr>
+          <a:xfrm>
+            <a:off x="548640" y="6355080"/>
+            <a:ext cx="11064240" cy="320040"/>
+          </a:xfrm>
+          <a:prstGeom prst="rect">
+            <a:avLst/>
+          </a:prstGeom>
+          <a:noFill/>
+        </p:spPr>
+        <p:txBody>
+          <a:bodyPr wrap="square">
+            <a:noAutofit/>
+          </a:bodyPr>
+          <a:lstStyle/>
+          <a:p>
+            <a:pPr algn="r">
+              <a:lnSpc>
+                <a:spcPts val="2200"/>
+              </a:lnSpc>
+              <a:defRPr sz="1000" b="0">
+                <a:solidFill>
+                  <a:srgbClr val="666666"/>
+                </a:solidFill>
+                <a:latin typeface="Calibri"/>
+              </a:defRPr>
+            </a:pPr>
+            <a:r>
+              <a:t>learn_uart_spi_i2c / Module 4</a:t>
+            </a:r>
+          </a:p>
+        </p:txBody>
+      </p:sp>
+    </p:spTree>
+  </p:cSld>
+  <p:clrMapOvr>
+    <a:masterClrMapping/>
+  </p:clrMapOvr>
+</p:sld>
+</file>
+
+<file path=ppt/slides/slide28.xml><?xml version="1.0" encoding="utf-8"?>
+<p:sld xmlns:a="http://schemas.openxmlformats.org/drawingml/2006/main" xmlns:p="http://schemas.openxmlformats.org/presentationml/2006/main" xmlns:r="http://schemas.openxmlformats.org/officeDocument/2006/relationships">
+  <p:cSld>
+    <p:spTree>
+      <p:nvGrpSpPr>
+        <p:cNvPr id="1" name=""/>
+        <p:cNvGrpSpPr/>
+        <p:nvPr/>
+      </p:nvGrpSpPr>
+      <p:grpSpPr/>
+      <p:sp>
+        <p:nvSpPr>
+          <p:cNvPr id="2" name="TextBox 1"/>
+          <p:cNvSpPr txBox="1"/>
+          <p:nvPr/>
+        </p:nvSpPr>
+        <p:spPr>
+          <a:xfrm>
+            <a:off x="548640" y="411480"/>
+            <a:ext cx="11064240" cy="777240"/>
+          </a:xfrm>
+          <a:prstGeom prst="rect">
+            <a:avLst/>
+          </a:prstGeom>
+          <a:noFill/>
+        </p:spPr>
+        <p:txBody>
+          <a:bodyPr wrap="square">
+            <a:noAutofit/>
+          </a:bodyPr>
+          <a:lstStyle/>
+          <a:p>
+            <a:pPr>
+              <a:lnSpc>
+                <a:spcPts val="2200"/>
+              </a:lnSpc>
+              <a:defRPr sz="2800" b="1">
+                <a:solidFill>
+                  <a:srgbClr val="1A1A2E"/>
+                </a:solidFill>
+                <a:latin typeface="Calibri"/>
+              </a:defRPr>
+            </a:pPr>
+            <a:r>
+              <a:t>What you should know</a:t>
+            </a:r>
+          </a:p>
+        </p:txBody>
+      </p:sp>
+      <p:sp>
+        <p:nvSpPr>
+          <p:cNvPr id="3" name="TextBox 2"/>
+          <p:cNvSpPr txBox="1"/>
+          <p:nvPr/>
+        </p:nvSpPr>
+        <p:spPr>
+          <a:xfrm>
+            <a:off x="548640" y="1234440"/>
+            <a:ext cx="11064240" cy="4937760"/>
+          </a:xfrm>
+          <a:prstGeom prst="rect">
+            <a:avLst/>
+          </a:prstGeom>
+          <a:noFill/>
+        </p:spPr>
+        <p:txBody>
+          <a:bodyPr wrap="square">
+            <a:noAutofit/>
+          </a:bodyPr>
+          <a:lstStyle/>
+          <a:p>
+            <a:pPr>
+              <a:lnSpc>
+                <a:spcPts val="2200"/>
+              </a:lnSpc>
+              <a:spcAft>
+                <a:spcPts val="1000"/>
+              </a:spcAft>
+              <a:defRPr sz="2000" b="0">
+                <a:solidFill>
+                  <a:srgbClr val="333333"/>
+                </a:solidFill>
+                <a:latin typeface="Calibri"/>
+              </a:defRPr>
+            </a:pPr>
+            <a:r>
+              <a:t>• Describe the UART UVM agent (transaction, sequence,</a:t>
+            </a:r>
+          </a:p>
+          <a:p>
+            <a:pPr>
+              <a:lnSpc>
+                <a:spcPts val="2200"/>
+              </a:lnSpc>
+              <a:spcAft>
+                <a:spcPts val="1000"/>
+              </a:spcAft>
+              <a:defRPr sz="2000" b="0">
+                <a:solidFill>
+                  <a:srgbClr val="333333"/>
+                </a:solidFill>
+                <a:latin typeface="Calibri"/>
+              </a:defRPr>
+            </a:pPr>
+            <a:r>
+              <a:t>      driver, monitor, scoreboard).</a:t>
+            </a:r>
+          </a:p>
+          <a:p>
+            <a:pPr>
+              <a:lnSpc>
+                <a:spcPts val="2200"/>
+              </a:lnSpc>
+              <a:spcAft>
+                <a:spcPts val="1000"/>
+              </a:spcAft>
+              <a:defRPr sz="2000" b="0">
+                <a:solidFill>
+                  <a:srgbClr val="333333"/>
+                </a:solidFill>
+                <a:latin typeface="Calibri"/>
+              </a:defRPr>
+            </a:pPr>
+            <a:r>
+              <a:t>• Explain loopback (TX→RX) and how TX and RX are both</a:t>
+            </a:r>
+          </a:p>
+          <a:p>
+            <a:pPr>
+              <a:lnSpc>
+                <a:spcPts val="2200"/>
+              </a:lnSpc>
+              <a:spcAft>
+                <a:spcPts val="1000"/>
+              </a:spcAft>
+              <a:defRPr sz="2000" b="0">
+                <a:solidFill>
+                  <a:srgbClr val="333333"/>
+                </a:solidFill>
+                <a:latin typeface="Calibri"/>
+              </a:defRPr>
+            </a:pPr>
+            <a:r>
+              <a:t>      checked in the scoreboard.</a:t>
+            </a:r>
+          </a:p>
+          <a:p>
+            <a:pPr>
+              <a:lnSpc>
+                <a:spcPts val="2200"/>
+              </a:lnSpc>
+              <a:spcAft>
+                <a:spcPts val="1000"/>
+              </a:spcAft>
+              <a:defRPr sz="2000" b="0">
+                <a:solidFill>
+                  <a:srgbClr val="333333"/>
+                </a:solidFill>
+                <a:latin typeface="Calibri"/>
+              </a:defRPr>
+            </a:pPr>
+            <a:r>
+              <a:t>• Run the uart_uvm example and interpret UVM output.</a:t>
+            </a:r>
+          </a:p>
+          <a:p>
+            <a:pPr>
+              <a:lnSpc>
+                <a:spcPts val="2200"/>
+              </a:lnSpc>
+              <a:spcAft>
+                <a:spcPts val="1000"/>
+              </a:spcAft>
+              <a:defRPr sz="2000" b="0">
+                <a:solidFill>
+                  <a:srgbClr val="333333"/>
+                </a:solidFill>
+                <a:latin typeface="Calibri"/>
+              </a:defRPr>
+            </a:pPr>
+            <a:r>
+              <a:t>• Ready for Module 5: SPI protocol + RTL + basic</a:t>
+            </a:r>
+          </a:p>
+          <a:p>
+            <a:pPr>
+              <a:lnSpc>
+                <a:spcPts val="2200"/>
+              </a:lnSpc>
+              <a:spcAft>
+                <a:spcPts val="1000"/>
+              </a:spcAft>
+              <a:defRPr sz="2000" b="0">
+                <a:solidFill>
+                  <a:srgbClr val="333333"/>
+                </a:solidFill>
+                <a:latin typeface="Calibri"/>
+              </a:defRPr>
+            </a:pPr>
+            <a:r>
+              <a:t>      testbench.</a:t>
+            </a:r>
+          </a:p>
+        </p:txBody>
+      </p:sp>
+      <p:sp>
+        <p:nvSpPr>
+          <p:cNvPr id="4" name="TextBox 3"/>
+          <p:cNvSpPr txBox="1"/>
+          <p:nvPr/>
+        </p:nvSpPr>
+        <p:spPr>
+          <a:xfrm>
+            <a:off x="548640" y="6355080"/>
+            <a:ext cx="11064240" cy="320040"/>
+          </a:xfrm>
+          <a:prstGeom prst="rect">
+            <a:avLst/>
+          </a:prstGeom>
+          <a:noFill/>
+        </p:spPr>
+        <p:txBody>
+          <a:bodyPr wrap="square">
+            <a:noAutofit/>
+          </a:bodyPr>
+          <a:lstStyle/>
+          <a:p>
+            <a:pPr algn="r">
+              <a:lnSpc>
+                <a:spcPts val="2200"/>
+              </a:lnSpc>
+              <a:defRPr sz="1000" b="0">
+                <a:solidFill>
+                  <a:srgbClr val="666666"/>
+                </a:solidFill>
+                <a:latin typeface="Calibri"/>
+              </a:defRPr>
+            </a:pPr>
+            <a:r>
+              <a:t>learn_uart_spi_i2c / Module 4</a:t>
+            </a:r>
+          </a:p>
+        </p:txBody>
+      </p:sp>
+    </p:spTree>
+  </p:cSld>
+  <p:clrMapOvr>
+    <a:masterClrMapping/>
+  </p:clrMapOvr>
+</p:sld>
+</file>
+
+<file path=ppt/slides/slide29.xml><?xml version="1.0" encoding="utf-8"?>
+<p:sld xmlns:a="http://schemas.openxmlformats.org/drawingml/2006/main" xmlns:p="http://schemas.openxmlformats.org/presentationml/2006/main" xmlns:r="http://schemas.openxmlformats.org/officeDocument/2006/relationships">
+  <p:cSld>
+    <p:spTree>
+      <p:nvGrpSpPr>
+        <p:cNvPr id="1" name=""/>
+        <p:cNvGrpSpPr/>
+        <p:nvPr/>
+      </p:nvGrpSpPr>
+      <p:grpSpPr/>
+      <p:sp>
+        <p:nvSpPr>
+          <p:cNvPr id="2" name="TextBox 1"/>
+          <p:cNvSpPr txBox="1"/>
+          <p:nvPr/>
+        </p:nvSpPr>
+        <p:spPr>
+          <a:xfrm>
+            <a:off x="548640" y="411480"/>
+            <a:ext cx="11064240" cy="777240"/>
+          </a:xfrm>
+          <a:prstGeom prst="rect">
+            <a:avLst/>
+          </a:prstGeom>
+          <a:noFill/>
+        </p:spPr>
+        <p:txBody>
+          <a:bodyPr wrap="square">
+            <a:noAutofit/>
+          </a:bodyPr>
+          <a:lstStyle/>
+          <a:p>
+            <a:pPr>
+              <a:lnSpc>
+                <a:spcPts val="2200"/>
+              </a:lnSpc>
+              <a:defRPr sz="2800" b="1">
+                <a:solidFill>
+                  <a:srgbClr val="1A1A2E"/>
+                </a:solidFill>
+                <a:latin typeface="Calibri"/>
+              </a:defRPr>
+            </a:pPr>
+            <a:r>
+              <a:t>Exercises</a:t>
+            </a:r>
+          </a:p>
+        </p:txBody>
+      </p:sp>
+      <p:sp>
+        <p:nvSpPr>
+          <p:cNvPr id="3" name="TextBox 2"/>
+          <p:cNvSpPr txBox="1"/>
+          <p:nvPr/>
+        </p:nvSpPr>
+        <p:spPr>
+          <a:xfrm>
+            <a:off x="548640" y="1234440"/>
+            <a:ext cx="11064240" cy="4937760"/>
+          </a:xfrm>
+          <a:prstGeom prst="rect">
+            <a:avLst/>
+          </a:prstGeom>
+          <a:noFill/>
+        </p:spPr>
+        <p:txBody>
+          <a:bodyPr wrap="square">
+            <a:noAutofit/>
+          </a:bodyPr>
+          <a:lstStyle/>
+          <a:p>
+            <a:pPr>
+              <a:lnSpc>
+                <a:spcPts val="2200"/>
+              </a:lnSpc>
+              <a:spcAft>
+                <a:spcPts val="1000"/>
+              </a:spcAft>
+              <a:defRPr sz="2000" b="0">
+                <a:solidFill>
+                  <a:srgbClr val="333333"/>
+                </a:solidFill>
+                <a:latin typeface="Calibri"/>
+              </a:defRPr>
+            </a:pPr>
+            <a:r>
+              <a:t>• Run uart_uvm</a:t>
+            </a:r>
+          </a:p>
+          <a:p>
+            <a:pPr>
+              <a:lnSpc>
+                <a:spcPts val="2200"/>
+              </a:lnSpc>
+              <a:spcAft>
+                <a:spcPts val="1000"/>
+              </a:spcAft>
+              <a:defRPr sz="2000" b="0">
+                <a:solidFill>
+                  <a:srgbClr val="333333"/>
+                </a:solidFill>
+                <a:latin typeface="Calibri"/>
+              </a:defRPr>
+            </a:pPr>
+            <a:r>
+              <a:t>• Trace one transaction</a:t>
+            </a:r>
+          </a:p>
+          <a:p>
+            <a:pPr>
+              <a:lnSpc>
+                <a:spcPts val="2200"/>
+              </a:lnSpc>
+              <a:spcAft>
+                <a:spcPts val="1000"/>
+              </a:spcAft>
+              <a:defRPr sz="2000" b="0">
+                <a:solidFill>
+                  <a:srgbClr val="333333"/>
+                </a:solidFill>
+                <a:latin typeface="Calibri"/>
+              </a:defRPr>
+            </a:pPr>
+            <a:r>
+              <a:t>• Change the sequence</a:t>
+            </a:r>
+          </a:p>
+          <a:p>
+            <a:pPr>
+              <a:lnSpc>
+                <a:spcPts val="2200"/>
+              </a:lnSpc>
+              <a:spcAft>
+                <a:spcPts val="1000"/>
+              </a:spcAft>
+              <a:defRPr sz="2000" b="0">
+                <a:solidFill>
+                  <a:srgbClr val="333333"/>
+                </a:solidFill>
+                <a:latin typeface="Calibri"/>
+              </a:defRPr>
+            </a:pPr>
+            <a:r>
+              <a:t>• Optional: Loopback path</a:t>
+            </a:r>
+          </a:p>
+        </p:txBody>
+      </p:sp>
+      <p:sp>
+        <p:nvSpPr>
+          <p:cNvPr id="4" name="TextBox 3"/>
+          <p:cNvSpPr txBox="1"/>
+          <p:nvPr/>
+        </p:nvSpPr>
+        <p:spPr>
+          <a:xfrm>
+            <a:off x="548640" y="6355080"/>
+            <a:ext cx="11064240" cy="320040"/>
+          </a:xfrm>
+          <a:prstGeom prst="rect">
+            <a:avLst/>
+          </a:prstGeom>
+          <a:noFill/>
+        </p:spPr>
+        <p:txBody>
+          <a:bodyPr wrap="square">
+            <a:noAutofit/>
+          </a:bodyPr>
+          <a:lstStyle/>
+          <a:p>
+            <a:pPr algn="r">
+              <a:lnSpc>
+                <a:spcPts val="2200"/>
+              </a:lnSpc>
+              <a:defRPr sz="1000" b="0">
+                <a:solidFill>
+                  <a:srgbClr val="666666"/>
+                </a:solidFill>
+                <a:latin typeface="Calibri"/>
+              </a:defRPr>
+            </a:pPr>
+            <a:r>
+              <a:t>learn_uart_spi_i2c / Module 4</a:t>
+            </a:r>
+          </a:p>
+        </p:txBody>
+      </p:sp>
+    </p:spTree>
+  </p:cSld>
+  <p:clrMapOvr>
+    <a:masterClrMapping/>
+  </p:clrMapOvr>
+</p:sld>
+</file>
+
 <file path=ppt/slides/slide3.xml><?xml version="1.0" encoding="utf-8"?>
 <p:sld xmlns:a="http://schemas.openxmlformats.org/drawingml/2006/main" xmlns:p="http://schemas.openxmlformats.org/presentationml/2006/main" xmlns:r="http://schemas.openxmlformats.org/officeDocument/2006/relationships">
   <p:cSld>
@@ -5792,6 +8254,491 @@
             </a:pPr>
             <a:r>
               <a:t>      vendored UVM).</a:t>
+            </a:r>
+          </a:p>
+        </p:txBody>
+      </p:sp>
+      <p:sp>
+        <p:nvSpPr>
+          <p:cNvPr id="4" name="TextBox 3"/>
+          <p:cNvSpPr txBox="1"/>
+          <p:nvPr/>
+        </p:nvSpPr>
+        <p:spPr>
+          <a:xfrm>
+            <a:off x="548640" y="6355080"/>
+            <a:ext cx="11064240" cy="320040"/>
+          </a:xfrm>
+          <a:prstGeom prst="rect">
+            <a:avLst/>
+          </a:prstGeom>
+          <a:noFill/>
+        </p:spPr>
+        <p:txBody>
+          <a:bodyPr wrap="square">
+            <a:noAutofit/>
+          </a:bodyPr>
+          <a:lstStyle/>
+          <a:p>
+            <a:pPr algn="r">
+              <a:lnSpc>
+                <a:spcPts val="2200"/>
+              </a:lnSpc>
+              <a:defRPr sz="1000" b="0">
+                <a:solidFill>
+                  <a:srgbClr val="666666"/>
+                </a:solidFill>
+                <a:latin typeface="Calibri"/>
+              </a:defRPr>
+            </a:pPr>
+            <a:r>
+              <a:t>learn_uart_spi_i2c / Module 4</a:t>
+            </a:r>
+          </a:p>
+        </p:txBody>
+      </p:sp>
+    </p:spTree>
+  </p:cSld>
+  <p:clrMapOvr>
+    <a:masterClrMapping/>
+  </p:clrMapOvr>
+</p:sld>
+</file>
+
+<file path=ppt/slides/slide30.xml><?xml version="1.0" encoding="utf-8"?>
+<p:sld xmlns:a="http://schemas.openxmlformats.org/drawingml/2006/main" xmlns:p="http://schemas.openxmlformats.org/presentationml/2006/main" xmlns:r="http://schemas.openxmlformats.org/officeDocument/2006/relationships">
+  <p:cSld>
+    <p:spTree>
+      <p:nvGrpSpPr>
+        <p:cNvPr id="1" name=""/>
+        <p:cNvGrpSpPr/>
+        <p:nvPr/>
+      </p:nvGrpSpPr>
+      <p:grpSpPr/>
+      <p:sp>
+        <p:nvSpPr>
+          <p:cNvPr id="2" name="TextBox 1"/>
+          <p:cNvSpPr txBox="1"/>
+          <p:nvPr/>
+        </p:nvSpPr>
+        <p:spPr>
+          <a:xfrm>
+            <a:off x="548640" y="411480"/>
+            <a:ext cx="11064240" cy="777240"/>
+          </a:xfrm>
+          <a:prstGeom prst="rect">
+            <a:avLst/>
+          </a:prstGeom>
+          <a:noFill/>
+        </p:spPr>
+        <p:txBody>
+          <a:bodyPr wrap="square">
+            <a:noAutofit/>
+          </a:bodyPr>
+          <a:lstStyle/>
+          <a:p>
+            <a:pPr>
+              <a:lnSpc>
+                <a:spcPts val="2200"/>
+              </a:lnSpc>
+              <a:defRPr sz="2800" b="1">
+                <a:solidFill>
+                  <a:srgbClr val="1A1A2E"/>
+                </a:solidFill>
+                <a:latin typeface="Calibri"/>
+              </a:defRPr>
+            </a:pPr>
+            <a:r>
+              <a:t>Assessment checklist</a:t>
+            </a:r>
+          </a:p>
+        </p:txBody>
+      </p:sp>
+      <p:sp>
+        <p:nvSpPr>
+          <p:cNvPr id="3" name="TextBox 2"/>
+          <p:cNvSpPr txBox="1"/>
+          <p:nvPr/>
+        </p:nvSpPr>
+        <p:spPr>
+          <a:xfrm>
+            <a:off x="548640" y="1234440"/>
+            <a:ext cx="11064240" cy="4937760"/>
+          </a:xfrm>
+          <a:prstGeom prst="rect">
+            <a:avLst/>
+          </a:prstGeom>
+          <a:noFill/>
+        </p:spPr>
+        <p:txBody>
+          <a:bodyPr wrap="square">
+            <a:noAutofit/>
+          </a:bodyPr>
+          <a:lstStyle/>
+          <a:p>
+            <a:pPr>
+              <a:lnSpc>
+                <a:spcPts val="2200"/>
+              </a:lnSpc>
+              <a:spcAft>
+                <a:spcPts val="1000"/>
+              </a:spcAft>
+              <a:defRPr sz="2000" b="0">
+                <a:solidFill>
+                  <a:srgbClr val="333333"/>
+                </a:solidFill>
+                <a:latin typeface="Calibri"/>
+              </a:defRPr>
+            </a:pPr>
+            <a:r>
+              <a:t>• Can describe the UART UVM agent: transaction (one</a:t>
+            </a:r>
+          </a:p>
+          <a:p>
+            <a:pPr>
+              <a:lnSpc>
+                <a:spcPts val="2200"/>
+              </a:lnSpc>
+              <a:spcAft>
+                <a:spcPts val="1000"/>
+              </a:spcAft>
+              <a:defRPr sz="2000" b="0">
+                <a:solidFill>
+                  <a:srgbClr val="333333"/>
+                </a:solidFill>
+                <a:latin typeface="Calibri"/>
+              </a:defRPr>
+            </a:pPr>
+            <a:r>
+              <a:t>      byte), sequence, driver, monitor, scoreboard.</a:t>
+            </a:r>
+          </a:p>
+          <a:p>
+            <a:pPr>
+              <a:lnSpc>
+                <a:spcPts val="2200"/>
+              </a:lnSpc>
+              <a:spcAft>
+                <a:spcPts val="1000"/>
+              </a:spcAft>
+              <a:defRPr sz="2000" b="0">
+                <a:solidFill>
+                  <a:srgbClr val="333333"/>
+                </a:solidFill>
+                <a:latin typeface="Calibri"/>
+              </a:defRPr>
+            </a:pPr>
+            <a:r>
+              <a:t>• Can explain loopback and how TX and RX are both</a:t>
+            </a:r>
+          </a:p>
+          <a:p>
+            <a:pPr>
+              <a:lnSpc>
+                <a:spcPts val="2200"/>
+              </a:lnSpc>
+              <a:spcAft>
+                <a:spcPts val="1000"/>
+              </a:spcAft>
+              <a:defRPr sz="2000" b="0">
+                <a:solidFill>
+                  <a:srgbClr val="333333"/>
+                </a:solidFill>
+                <a:latin typeface="Calibri"/>
+              </a:defRPr>
+            </a:pPr>
+            <a:r>
+              <a:t>      checked.</a:t>
+            </a:r>
+          </a:p>
+          <a:p>
+            <a:pPr>
+              <a:lnSpc>
+                <a:spcPts val="2200"/>
+              </a:lnSpc>
+              <a:spcAft>
+                <a:spcPts val="1000"/>
+              </a:spcAft>
+              <a:defRPr sz="2000" b="0">
+                <a:solidFill>
+                  <a:srgbClr val="333333"/>
+                </a:solidFill>
+                <a:latin typeface="Calibri"/>
+              </a:defRPr>
+            </a:pPr>
+            <a:r>
+              <a:t>• Can run uart_uvm and interpret UVM output (phases,</a:t>
+            </a:r>
+          </a:p>
+          <a:p>
+            <a:pPr>
+              <a:lnSpc>
+                <a:spcPts val="2200"/>
+              </a:lnSpc>
+              <a:spcAft>
+                <a:spcPts val="1000"/>
+              </a:spcAft>
+              <a:defRPr sz="2000" b="0">
+                <a:solidFill>
+                  <a:srgbClr val="333333"/>
+                </a:solidFill>
+                <a:latin typeface="Calibri"/>
+              </a:defRPr>
+            </a:pPr>
+            <a:r>
+              <a:t>      scoreboard summary).</a:t>
+            </a:r>
+          </a:p>
+          <a:p>
+            <a:pPr>
+              <a:lnSpc>
+                <a:spcPts val="2200"/>
+              </a:lnSpc>
+              <a:spcAft>
+                <a:spcPts val="1000"/>
+              </a:spcAft>
+              <a:defRPr sz="2000" b="0">
+                <a:solidFill>
+                  <a:srgbClr val="333333"/>
+                </a:solidFill>
+                <a:latin typeface="Calibri"/>
+              </a:defRPr>
+            </a:pPr>
+            <a:r>
+              <a:t>• Ready for Module 5: SPI protocol + RTL + basic</a:t>
+            </a:r>
+          </a:p>
+          <a:p>
+            <a:pPr>
+              <a:lnSpc>
+                <a:spcPts val="2200"/>
+              </a:lnSpc>
+              <a:spcAft>
+                <a:spcPts val="1000"/>
+              </a:spcAft>
+              <a:defRPr sz="2000" b="0">
+                <a:solidFill>
+                  <a:srgbClr val="333333"/>
+                </a:solidFill>
+                <a:latin typeface="Calibri"/>
+              </a:defRPr>
+            </a:pPr>
+            <a:r>
+              <a:t>      testbench.</a:t>
+            </a:r>
+          </a:p>
+        </p:txBody>
+      </p:sp>
+      <p:sp>
+        <p:nvSpPr>
+          <p:cNvPr id="4" name="TextBox 3"/>
+          <p:cNvSpPr txBox="1"/>
+          <p:nvPr/>
+        </p:nvSpPr>
+        <p:spPr>
+          <a:xfrm>
+            <a:off x="548640" y="6355080"/>
+            <a:ext cx="11064240" cy="320040"/>
+          </a:xfrm>
+          <a:prstGeom prst="rect">
+            <a:avLst/>
+          </a:prstGeom>
+          <a:noFill/>
+        </p:spPr>
+        <p:txBody>
+          <a:bodyPr wrap="square">
+            <a:noAutofit/>
+          </a:bodyPr>
+          <a:lstStyle/>
+          <a:p>
+            <a:pPr algn="r">
+              <a:lnSpc>
+                <a:spcPts val="2200"/>
+              </a:lnSpc>
+              <a:defRPr sz="1000" b="0">
+                <a:solidFill>
+                  <a:srgbClr val="666666"/>
+                </a:solidFill>
+                <a:latin typeface="Calibri"/>
+              </a:defRPr>
+            </a:pPr>
+            <a:r>
+              <a:t>learn_uart_spi_i2c / Module 4</a:t>
+            </a:r>
+          </a:p>
+        </p:txBody>
+      </p:sp>
+    </p:spTree>
+  </p:cSld>
+  <p:clrMapOvr>
+    <a:masterClrMapping/>
+  </p:clrMapOvr>
+</p:sld>
+</file>
+
+<file path=ppt/slides/slide31.xml><?xml version="1.0" encoding="utf-8"?>
+<p:sld xmlns:a="http://schemas.openxmlformats.org/drawingml/2006/main" xmlns:p="http://schemas.openxmlformats.org/presentationml/2006/main" xmlns:r="http://schemas.openxmlformats.org/officeDocument/2006/relationships">
+  <p:cSld>
+    <p:spTree>
+      <p:nvGrpSpPr>
+        <p:cNvPr id="1" name=""/>
+        <p:cNvGrpSpPr/>
+        <p:nvPr/>
+      </p:nvGrpSpPr>
+      <p:grpSpPr/>
+      <p:sp>
+        <p:nvSpPr>
+          <p:cNvPr id="2" name="TextBox 1"/>
+          <p:cNvSpPr txBox="1"/>
+          <p:nvPr/>
+        </p:nvSpPr>
+        <p:spPr>
+          <a:xfrm>
+            <a:off x="548640" y="411480"/>
+            <a:ext cx="11064240" cy="777240"/>
+          </a:xfrm>
+          <a:prstGeom prst="rect">
+            <a:avLst/>
+          </a:prstGeom>
+          <a:noFill/>
+        </p:spPr>
+        <p:txBody>
+          <a:bodyPr wrap="square">
+            <a:noAutofit/>
+          </a:bodyPr>
+          <a:lstStyle/>
+          <a:p>
+            <a:pPr>
+              <a:lnSpc>
+                <a:spcPts val="2200"/>
+              </a:lnSpc>
+              <a:defRPr sz="2800" b="1">
+                <a:solidFill>
+                  <a:srgbClr val="1A1A2E"/>
+                </a:solidFill>
+                <a:latin typeface="Calibri"/>
+              </a:defRPr>
+            </a:pPr>
+            <a:r>
+              <a:t>Summary &amp; next steps</a:t>
+            </a:r>
+          </a:p>
+        </p:txBody>
+      </p:sp>
+      <p:sp>
+        <p:nvSpPr>
+          <p:cNvPr id="3" name="TextBox 2"/>
+          <p:cNvSpPr txBox="1"/>
+          <p:nvPr/>
+        </p:nvSpPr>
+        <p:spPr>
+          <a:xfrm>
+            <a:off x="548640" y="1234440"/>
+            <a:ext cx="11064240" cy="4937760"/>
+          </a:xfrm>
+          <a:prstGeom prst="rect">
+            <a:avLst/>
+          </a:prstGeom>
+          <a:noFill/>
+        </p:spPr>
+        <p:txBody>
+          <a:bodyPr wrap="square">
+            <a:noAutofit/>
+          </a:bodyPr>
+          <a:lstStyle/>
+          <a:p>
+            <a:pPr>
+              <a:lnSpc>
+                <a:spcPts val="2200"/>
+              </a:lnSpc>
+              <a:spcAft>
+                <a:spcPts val="1000"/>
+              </a:spcAft>
+              <a:defRPr sz="2000" b="0">
+                <a:solidFill>
+                  <a:srgbClr val="333333"/>
+                </a:solidFill>
+                <a:latin typeface="Calibri"/>
+              </a:defRPr>
+            </a:pPr>
+            <a:r>
+              <a:t>• Extend UART verification to **UVM+SV** — UART agent</a:t>
+            </a:r>
+          </a:p>
+          <a:p>
+            <a:pPr>
+              <a:lnSpc>
+                <a:spcPts val="2200"/>
+              </a:lnSpc>
+              <a:spcAft>
+                <a:spcPts val="1000"/>
+              </a:spcAft>
+              <a:defRPr sz="2000" b="0">
+                <a:solidFill>
+                  <a:srgbClr val="333333"/>
+                </a:solidFill>
+                <a:latin typeface="Calibri"/>
+              </a:defRPr>
+            </a:pPr>
+            <a:r>
+              <a:t>      (transaction, sequence, driver, monitor, scoreb…</a:t>
+            </a:r>
+          </a:p>
+          <a:p>
+            <a:pPr>
+              <a:lnSpc>
+                <a:spcPts val="2200"/>
+              </a:lnSpc>
+              <a:spcAft>
+                <a:spcPts val="1000"/>
+              </a:spcAft>
+              <a:defRPr sz="2000" b="0">
+                <a:solidFill>
+                  <a:srgbClr val="333333"/>
+                </a:solidFill>
+                <a:latin typeface="Calibri"/>
+              </a:defRPr>
+            </a:pPr>
+            <a:r>
+              <a:t>• Complete module4/CHECKLIST.md</a:t>
+            </a:r>
+          </a:p>
+          <a:p>
+            <a:pPr>
+              <a:lnSpc>
+                <a:spcPts val="2200"/>
+              </a:lnSpc>
+              <a:spcAft>
+                <a:spcPts val="1000"/>
+              </a:spcAft>
+              <a:defRPr sz="2000" b="0">
+                <a:solidFill>
+                  <a:srgbClr val="333333"/>
+                </a:solidFill>
+                <a:latin typeface="Calibri"/>
+              </a:defRPr>
+            </a:pPr>
+            <a:r>
+              <a:t>• Review module4/EXAMPLES.md and run each lab</a:t>
+            </a:r>
+          </a:p>
+          <a:p>
+            <a:pPr>
+              <a:lnSpc>
+                <a:spcPts val="2200"/>
+              </a:lnSpc>
+              <a:spcAft>
+                <a:spcPts val="1000"/>
+              </a:spcAft>
+              <a:defRPr sz="2000" b="0">
+                <a:solidFill>
+                  <a:srgbClr val="333333"/>
+                </a:solidFill>
+                <a:latin typeface="Calibri"/>
+              </a:defRPr>
+            </a:pPr>
+            <a:r>
+              <a:t>• Next: SPI</a:t>
             </a:r>
           </a:p>
         </p:txBody>
@@ -6203,7 +9150,7 @@
               </a:defRPr>
             </a:pPr>
             <a:r>
-              <a:t>Syllabus topics</a:t>
+              <a:t>How to learn this module</a:t>
             </a:r>
           </a:p>
         </p:txBody>
@@ -6299,7 +9246,7 @@
               </a:defRPr>
             </a:pPr>
             <a:r>
-              <a:t>1. UART UVM Agent</a:t>
+              <a:t>Suggested learning path</a:t>
             </a:r>
           </a:p>
         </p:txBody>
@@ -6341,7 +9288,7 @@
               </a:defRPr>
             </a:pPr>
             <a:r>
-              <a:t>• Transaction (UartTxTransaction): byte to send</a:t>
+              <a:t>• Read the detailed UART learning guide:</a:t>
             </a:r>
           </a:p>
           <a:p>
@@ -6360,7 +9307,7 @@
               </a:defRPr>
             </a:pPr>
             <a:r>
-              <a:t>      (data); monitor fills observed_tx (reconstructed</a:t>
+              <a:t>      UART_LEARNING_GUIDE.md — what UART is, how it works</a:t>
             </a:r>
           </a:p>
           <a:p>
@@ -6379,7 +9326,7 @@
               </a:defRPr>
             </a:pPr>
             <a:r>
-              <a:t>      from…</a:t>
+              <a:t>      (frame,…</a:t>
             </a:r>
           </a:p>
           <a:p>
@@ -6398,7 +9345,7 @@
               </a:defRPr>
             </a:pPr>
             <a:r>
-              <a:t>• Sequence (UartTxSequence): produces directed</a:t>
+              <a:t>• Read the protocols + UVM overview:</a:t>
             </a:r>
           </a:p>
           <a:p>
@@ -6417,7 +9364,7 @@
               </a:defRPr>
             </a:pPr>
             <a:r>
-              <a:t>      transactions (0x00, 0x01, 0x55, 0xAA, 0xFF).</a:t>
+              <a:t>      LEARNING_GUIDE_PROTOCOLS_AND_UVM.md — Part B § 5.</a:t>
             </a:r>
           </a:p>
           <a:p>
@@ -6436,102 +9383,7 @@
               </a:defRPr>
             </a:pPr>
             <a:r>
-              <a:t>• Driver (UartTxDriver): gets transaction, drives</a:t>
-            </a:r>
-          </a:p>
-          <a:p>
-            <a:pPr>
-              <a:lnSpc>
-                <a:spcPts val="2200"/>
-              </a:lnSpc>
-              <a:spcAft>
-                <a:spcPts val="1000"/>
-              </a:spcAft>
-              <a:defRPr sz="2000" b="0">
-                <a:solidFill>
-                  <a:srgbClr val="333333"/>
-                </a:solidFill>
-                <a:latin typeface="Calibri"/>
-              </a:defRPr>
-            </a:pPr>
-            <a:r>
-              <a:t>      start and data for one cycle, waits 10 baud_ticks (…</a:t>
-            </a:r>
-          </a:p>
-          <a:p>
-            <a:pPr>
-              <a:lnSpc>
-                <a:spcPts val="2200"/>
-              </a:lnSpc>
-              <a:spcAft>
-                <a:spcPts val="1000"/>
-              </a:spcAft>
-              <a:defRPr sz="2000" b="0">
-                <a:solidFill>
-                  <a:srgbClr val="333333"/>
-                </a:solidFill>
-                <a:latin typeface="Calibri"/>
-              </a:defRPr>
-            </a:pPr>
-            <a:r>
-              <a:t>• Monitor (UartTxMonitor): watches tx line for start</a:t>
-            </a:r>
-          </a:p>
-          <a:p>
-            <a:pPr>
-              <a:lnSpc>
-                <a:spcPts val="2200"/>
-              </a:lnSpc>
-              <a:spcAft>
-                <a:spcPts val="1000"/>
-              </a:spcAft>
-              <a:defRPr sz="2000" b="0">
-                <a:solidFill>
-                  <a:srgbClr val="333333"/>
-                </a:solidFill>
-                <a:latin typeface="Calibri"/>
-              </a:defRPr>
-            </a:pPr>
-            <a:r>
-              <a:t>      bit, samples 8 data bits per baud_tick, writes t…</a:t>
-            </a:r>
-          </a:p>
-          <a:p>
-            <a:pPr>
-              <a:lnSpc>
-                <a:spcPts val="2200"/>
-              </a:lnSpc>
-              <a:spcAft>
-                <a:spcPts val="1000"/>
-              </a:spcAft>
-              <a:defRPr sz="2000" b="0">
-                <a:solidFill>
-                  <a:srgbClr val="333333"/>
-                </a:solidFill>
-                <a:latin typeface="Calibri"/>
-              </a:defRPr>
-            </a:pPr>
-            <a:r>
-              <a:t>• Scoreboard (UartTxScoreboard): compares expected</a:t>
-            </a:r>
-          </a:p>
-          <a:p>
-            <a:pPr>
-              <a:lnSpc>
-                <a:spcPts val="2200"/>
-              </a:lnSpc>
-              <a:spcAft>
-                <a:spcPts val="1000"/>
-              </a:spcAft>
-              <a:defRPr sz="2000" b="0">
-                <a:solidFill>
-                  <a:srgbClr val="333333"/>
-                </a:solidFill>
-                <a:latin typeface="Calibri"/>
-              </a:defRPr>
-            </a:pPr>
-            <a:r>
-              <a:t>      (from test) vs observed_tx (from monitor); also ch…</a:t>
+              <a:t>      How UVM Maps t…</a:t>
             </a:r>
           </a:p>
         </p:txBody>
@@ -6601,8 +9453,8 @@
         </p:nvSpPr>
         <p:spPr>
           <a:xfrm>
-            <a:off x="548640" y="411480"/>
-            <a:ext cx="11064240" cy="777240"/>
+            <a:off x="548640" y="2743200"/>
+            <a:ext cx="11064240" cy="1371600"/>
           </a:xfrm>
           <a:prstGeom prst="rect">
             <a:avLst/>
@@ -6615,11 +9467,11 @@
           </a:bodyPr>
           <a:lstStyle/>
           <a:p>
-            <a:pPr>
-              <a:lnSpc>
-                <a:spcPts val="2200"/>
-              </a:lnSpc>
-              <a:defRPr sz="2800" b="1">
+            <a:pPr algn="ctr">
+              <a:lnSpc>
+                <a:spcPts val="2200"/>
+              </a:lnSpc>
+              <a:defRPr sz="3600" b="1">
                 <a:solidFill>
                   <a:srgbClr val="1A1A2E"/>
                 </a:solidFill>
@@ -6627,7 +9479,7 @@
               </a:defRPr>
             </a:pPr>
             <a:r>
-              <a:t>2. Loopback and RX Check</a:t>
+              <a:t>Design architecture</a:t>
             </a:r>
           </a:p>
         </p:txBody>
@@ -6635,105 +9487,6 @@
       <p:sp>
         <p:nvSpPr>
           <p:cNvPr id="3" name="TextBox 2"/>
-          <p:cNvSpPr txBox="1"/>
-          <p:nvPr/>
-        </p:nvSpPr>
-        <p:spPr>
-          <a:xfrm>
-            <a:off x="548640" y="1234440"/>
-            <a:ext cx="11064240" cy="4937760"/>
-          </a:xfrm>
-          <a:prstGeom prst="rect">
-            <a:avLst/>
-          </a:prstGeom>
-          <a:noFill/>
-        </p:spPr>
-        <p:txBody>
-          <a:bodyPr wrap="square">
-            <a:noAutofit/>
-          </a:bodyPr>
-          <a:lstStyle/>
-          <a:p>
-            <a:pPr>
-              <a:lnSpc>
-                <a:spcPts val="2200"/>
-              </a:lnSpc>
-              <a:spcAft>
-                <a:spcPts val="1000"/>
-              </a:spcAft>
-              <a:defRPr sz="2000" b="0">
-                <a:solidFill>
-                  <a:srgbClr val="333333"/>
-                </a:solidFill>
-                <a:latin typeface="Calibri"/>
-              </a:defRPr>
-            </a:pPr>
-            <a:r>
-              <a:t>• Loopback: TX output (vif.tx) is connected to RX</a:t>
-            </a:r>
-          </a:p>
-          <a:p>
-            <a:pPr>
-              <a:lnSpc>
-                <a:spcPts val="2200"/>
-              </a:lnSpc>
-              <a:spcAft>
-                <a:spcPts val="1000"/>
-              </a:spcAft>
-              <a:defRPr sz="2000" b="0">
-                <a:solidFill>
-                  <a:srgbClr val="333333"/>
-                </a:solidFill>
-                <a:latin typeface="Calibri"/>
-              </a:defRPr>
-            </a:pPr>
-            <a:r>
-              <a:t>      input (dut_rx.rx). Bytes sent by driver are receive…</a:t>
-            </a:r>
-          </a:p>
-          <a:p>
-            <a:pPr>
-              <a:lnSpc>
-                <a:spcPts val="2200"/>
-              </a:lnSpc>
-              <a:spcAft>
-                <a:spcPts val="1000"/>
-              </a:spcAft>
-              <a:defRPr sz="2000" b="0">
-                <a:solidFill>
-                  <a:srgbClr val="333333"/>
-                </a:solidFill>
-                <a:latin typeface="Calibri"/>
-              </a:defRPr>
-            </a:pPr>
-            <a:r>
-              <a:t>• RX hook: An initial block in the top looks up the</a:t>
-            </a:r>
-          </a:p>
-          <a:p>
-            <a:pPr>
-              <a:lnSpc>
-                <a:spcPts val="2200"/>
-              </a:lnSpc>
-              <a:spcAft>
-                <a:spcPts val="1000"/>
-              </a:spcAft>
-              <a:defRPr sz="2000" b="0">
-                <a:solidFill>
-                  <a:srgbClr val="333333"/>
-                </a:solidFill>
-                <a:latin typeface="Calibri"/>
-              </a:defRPr>
-            </a:pPr>
-            <a:r>
-              <a:t>      scoreboard and calls check_rx_byte(rx_data) when…</a:t>
-            </a:r>
-          </a:p>
-        </p:txBody>
-      </p:sp>
-      <p:sp>
-        <p:nvSpPr>
-          <p:cNvPr id="4" name="TextBox 3"/>
           <p:cNvSpPr txBox="1"/>
           <p:nvPr/>
         </p:nvSpPr>
@@ -6822,21 +9575,45 @@
               </a:defRPr>
             </a:pPr>
             <a:r>
-              <a:t>3. Toolchain</a:t>
-            </a:r>
-          </a:p>
-        </p:txBody>
-      </p:sp>
-      <p:sp>
-        <p:nvSpPr>
-          <p:cNvPr id="3" name="TextBox 2"/>
+              <a:t>RTL / block architecture</a:t>
+            </a:r>
+          </a:p>
+        </p:txBody>
+      </p:sp>
+      <p:pic>
+        <p:nvPicPr>
+          <p:cNvPr id="3" name="Picture 2" descr="rtl_architecture.png"/>
+          <p:cNvPicPr>
+            <a:picLocks noChangeAspect="1"/>
+          </p:cNvPicPr>
+          <p:nvPr/>
+        </p:nvPicPr>
+        <p:blipFill>
+          <a:blip r:embed="rId2"/>
+          <a:stretch>
+            <a:fillRect/>
+          </a:stretch>
+        </p:blipFill>
+        <p:spPr>
+          <a:xfrm>
+            <a:off x="548640" y="1143000"/>
+            <a:ext cx="8128000" cy="4572000"/>
+          </a:xfrm>
+          <a:prstGeom prst="rect">
+            <a:avLst/>
+          </a:prstGeom>
+        </p:spPr>
+      </p:pic>
+      <p:sp>
+        <p:nvSpPr>
+          <p:cNvPr id="4" name="TextBox 3"/>
           <p:cNvSpPr txBox="1"/>
           <p:nvPr/>
         </p:nvSpPr>
         <p:spPr>
           <a:xfrm>
-            <a:off x="548640" y="1234440"/>
-            <a:ext cx="11064240" cy="4937760"/>
+            <a:off x="548640" y="5897880"/>
+            <a:ext cx="11064240" cy="411480"/>
           </a:xfrm>
           <a:prstGeom prst="rect">
             <a:avLst/>
@@ -6853,10 +9630,7 @@
               <a:lnSpc>
                 <a:spcPts val="2200"/>
               </a:lnSpc>
-              <a:spcAft>
-                <a:spcPts val="1000"/>
-              </a:spcAft>
-              <a:defRPr sz="2000" b="0">
+              <a:defRPr sz="1200" b="0">
                 <a:solidFill>
                   <a:srgbClr val="333333"/>
                 </a:solidFill>
@@ -6864,33 +9638,14 @@
               </a:defRPr>
             </a:pPr>
             <a:r>
-              <a:t>• Same as Module 2: Verilator with -sv, --timing,</a:t>
-            </a:r>
-          </a:p>
-          <a:p>
-            <a:pPr>
-              <a:lnSpc>
-                <a:spcPts val="2200"/>
-              </a:lnSpc>
-              <a:spcAft>
-                <a:spcPts val="1000"/>
-              </a:spcAft>
-              <a:defRPr sz="2000" b="0">
-                <a:solidFill>
-                  <a:srgbClr val="333333"/>
-                </a:solidFill>
-                <a:latin typeface="Calibri"/>
-              </a:defRPr>
-            </a:pPr>
-            <a:r>
-              <a:t>      --trace, UVM include paths, make SIM=verilator TEST…</a:t>
-            </a:r>
-          </a:p>
-        </p:txBody>
-      </p:sp>
-      <p:sp>
-        <p:nvSpPr>
-          <p:cNvPr id="4" name="TextBox 3"/>
+              <a:t>Module 4: DUT / block hierarchy (see module4/examples/).</a:t>
+            </a:r>
+          </a:p>
+        </p:txBody>
+      </p:sp>
+      <p:sp>
+        <p:nvSpPr>
+          <p:cNvPr id="5" name="TextBox 4"/>
           <p:cNvSpPr txBox="1"/>
           <p:nvPr/>
         </p:nvSpPr>
